--- a/tests/data/smartart.pptx
+++ b/tests/data/smartart.pptx
@@ -9,6 +9,10 @@
     <p:sldId id="257" r:id="rId3"/>
     <p:sldId id="258" r:id="rId4"/>
     <p:sldId id="259" r:id="rId5"/>
+    <p:sldId id="260" r:id="rId6"/>
+    <p:sldId id="261" r:id="rId7"/>
+    <p:sldId id="262" r:id="rId8"/>
+    <p:sldId id="263" r:id="rId9"/>
   </p:sldIdLst>
   <p:sldSz cx="9144000" cy="5143500"/>
 </p:presentation>
@@ -112,6 +116,122 @@
     </dgm:linClrLst>
     <dgm:txFillClrLst meth="repeat">
       <a:schemeClr val="accent4"/>
+    </dgm:txFillClrLst>
+  </dgm:styleLbl>
+  <dgm:styleLbl name="sibTrans2D1">
+    <dgm:fillClrLst meth="repeat">
+      <a:schemeClr val="accent2"/>
+    </dgm:fillClrLst>
+    <dgm:linClrLst meth="repeat">
+      <a:schemeClr val="accent2"/>
+    </dgm:linClrLst>
+  </dgm:styleLbl>
+  <dgm:styleLbl name="parChTrans1D1">
+    <dgm:linClrLst meth="repeat">
+      <a:schemeClr val="accent6"/>
+    </dgm:linClrLst>
+  </dgm:styleLbl>
+</dgm:colorsDef>
+</file>
+
+<file path=ppt/diagrams/colors5.xml><?xml version="1.0" encoding="utf-8"?>
+<dgm:colorsDef xmlns:dgm="http://schemas.openxmlformats.org/drawingml/2006/diagram" xmlns:a="http://schemas.openxmlformats.org/drawingml/2006/main" xmlns:r="http://schemas.openxmlformats.org/officeDocument/2006/relationships" uniqueId="test/colors">
+  <dgm:styleLbl name="node1">
+    <dgm:fillClrLst meth="repeat">
+      <a:schemeClr val="accent1"/>
+    </dgm:fillClrLst>
+    <dgm:linClrLst meth="repeat">
+      <a:schemeClr val="lt1"/>
+    </dgm:linClrLst>
+    <dgm:txFillClrLst meth="repeat">
+      <a:schemeClr val="lt1"/>
+    </dgm:txFillClrLst>
+  </dgm:styleLbl>
+  <dgm:styleLbl name="sibTrans2D1">
+    <dgm:fillClrLst meth="repeat">
+      <a:schemeClr val="accent2"/>
+    </dgm:fillClrLst>
+    <dgm:linClrLst meth="repeat">
+      <a:schemeClr val="accent2"/>
+    </dgm:linClrLst>
+  </dgm:styleLbl>
+  <dgm:styleLbl name="parChTrans1D1">
+    <dgm:linClrLst meth="repeat">
+      <a:schemeClr val="accent6"/>
+    </dgm:linClrLst>
+  </dgm:styleLbl>
+</dgm:colorsDef>
+</file>
+
+<file path=ppt/diagrams/colors6.xml><?xml version="1.0" encoding="utf-8"?>
+<dgm:colorsDef xmlns:dgm="http://schemas.openxmlformats.org/drawingml/2006/diagram" xmlns:a="http://schemas.openxmlformats.org/drawingml/2006/main" xmlns:r="http://schemas.openxmlformats.org/officeDocument/2006/relationships" uniqueId="test/colors">
+  <dgm:styleLbl name="node1">
+    <dgm:fillClrLst meth="repeat">
+      <a:schemeClr val="accent1"/>
+    </dgm:fillClrLst>
+    <dgm:linClrLst meth="repeat">
+      <a:schemeClr val="lt1"/>
+    </dgm:linClrLst>
+    <dgm:txFillClrLst meth="repeat">
+      <a:schemeClr val="lt1"/>
+    </dgm:txFillClrLst>
+  </dgm:styleLbl>
+  <dgm:styleLbl name="sibTrans2D1">
+    <dgm:fillClrLst meth="repeat">
+      <a:schemeClr val="accent2"/>
+    </dgm:fillClrLst>
+    <dgm:linClrLst meth="repeat">
+      <a:schemeClr val="accent2"/>
+    </dgm:linClrLst>
+  </dgm:styleLbl>
+  <dgm:styleLbl name="parChTrans1D1">
+    <dgm:linClrLst meth="repeat">
+      <a:schemeClr val="accent6"/>
+    </dgm:linClrLst>
+  </dgm:styleLbl>
+</dgm:colorsDef>
+</file>
+
+<file path=ppt/diagrams/colors7.xml><?xml version="1.0" encoding="utf-8"?>
+<dgm:colorsDef xmlns:dgm="http://schemas.openxmlformats.org/drawingml/2006/diagram" xmlns:a="http://schemas.openxmlformats.org/drawingml/2006/main" xmlns:r="http://schemas.openxmlformats.org/officeDocument/2006/relationships" uniqueId="test/colors">
+  <dgm:styleLbl name="node1">
+    <dgm:fillClrLst meth="repeat">
+      <a:schemeClr val="accent1"/>
+    </dgm:fillClrLst>
+    <dgm:linClrLst meth="repeat">
+      <a:schemeClr val="lt1"/>
+    </dgm:linClrLst>
+    <dgm:txFillClrLst meth="repeat">
+      <a:schemeClr val="lt1"/>
+    </dgm:txFillClrLst>
+  </dgm:styleLbl>
+  <dgm:styleLbl name="sibTrans2D1">
+    <dgm:fillClrLst meth="repeat">
+      <a:schemeClr val="accent2"/>
+    </dgm:fillClrLst>
+    <dgm:linClrLst meth="repeat">
+      <a:schemeClr val="accent2"/>
+    </dgm:linClrLst>
+  </dgm:styleLbl>
+  <dgm:styleLbl name="parChTrans1D1">
+    <dgm:linClrLst meth="repeat">
+      <a:schemeClr val="accent6"/>
+    </dgm:linClrLst>
+  </dgm:styleLbl>
+</dgm:colorsDef>
+</file>
+
+<file path=ppt/diagrams/colors8.xml><?xml version="1.0" encoding="utf-8"?>
+<dgm:colorsDef xmlns:dgm="http://schemas.openxmlformats.org/drawingml/2006/diagram" xmlns:a="http://schemas.openxmlformats.org/drawingml/2006/main" xmlns:r="http://schemas.openxmlformats.org/officeDocument/2006/relationships" uniqueId="test/colors">
+  <dgm:styleLbl name="node1">
+    <dgm:fillClrLst meth="repeat">
+      <a:schemeClr val="accent1"/>
+    </dgm:fillClrLst>
+    <dgm:linClrLst meth="repeat">
+      <a:schemeClr val="lt1"/>
+    </dgm:linClrLst>
+    <dgm:txFillClrLst meth="repeat">
+      <a:schemeClr val="lt1"/>
     </dgm:txFillClrLst>
   </dgm:styleLbl>
   <dgm:styleLbl name="sibTrans2D1">
@@ -447,6 +567,317 @@
       <dsp:dataModelExt xmlns:dsp="http://schemas.microsoft.com/office/drawing/2008/diagram" relId="rId6"/>
     </a:ext>
   </dgm:extLst>
+</dgm:dataModel>
+</file>
+
+<file path=ppt/diagrams/data5.xml><?xml version="1.0" encoding="utf-8"?>
+<dgm:dataModel xmlns:dgm="http://schemas.openxmlformats.org/drawingml/2006/diagram" xmlns:a="http://schemas.openxmlformats.org/drawingml/2006/main" xmlns:r="http://schemas.openxmlformats.org/officeDocument/2006/relationships">
+  <dgm:ptLst>
+    <dgm:pt modelId="{doc}" type="doc">
+      <dgm:prSet loTypeId="test/cycle"/>
+    </dgm:pt>
+    <dgm:pt modelId="{n1}">
+      <dgm:prSet/>
+      <dgm:spPr/>
+      <dgm:t>
+        <a:bodyPr/>
+        <a:lstStyle/>
+        <a:p>
+          <a:r>
+            <a:rPr lang="en-US"/>
+            <a:t>Plan</a:t>
+          </a:r>
+        </a:p>
+      </dgm:t>
+    </dgm:pt>
+    <dgm:pt modelId="{p1}" type="parTrans" cxnId="{c1}"/>
+    <dgm:pt modelId="{s1}" type="sibTrans" cxnId="{c1}"/>
+    <dgm:pt modelId="{n2}">
+      <dgm:prSet/>
+      <dgm:spPr/>
+      <dgm:t>
+        <a:bodyPr/>
+        <a:lstStyle/>
+        <a:p>
+          <a:r>
+            <a:rPr lang="en-US"/>
+            <a:t>Do</a:t>
+          </a:r>
+        </a:p>
+      </dgm:t>
+    </dgm:pt>
+    <dgm:pt modelId="{p2}" type="parTrans" cxnId="{c2}"/>
+    <dgm:pt modelId="{s2}" type="sibTrans" cxnId="{c2}"/>
+    <dgm:pt modelId="{n3}">
+      <dgm:prSet/>
+      <dgm:spPr/>
+      <dgm:t>
+        <a:bodyPr/>
+        <a:lstStyle/>
+        <a:p>
+          <a:r>
+            <a:rPr lang="en-US"/>
+            <a:t>Check</a:t>
+          </a:r>
+        </a:p>
+      </dgm:t>
+    </dgm:pt>
+    <dgm:pt modelId="{p3}" type="parTrans" cxnId="{c3}"/>
+    <dgm:pt modelId="{s3}" type="sibTrans" cxnId="{c3}"/>
+    <dgm:pt modelId="{n4}">
+      <dgm:prSet/>
+      <dgm:spPr/>
+      <dgm:t>
+        <a:bodyPr/>
+        <a:lstStyle/>
+        <a:p>
+          <a:r>
+            <a:rPr lang="en-US"/>
+            <a:t>Act</a:t>
+          </a:r>
+        </a:p>
+      </dgm:t>
+    </dgm:pt>
+    <dgm:pt modelId="{p4}" type="parTrans" cxnId="{c4}"/>
+    <dgm:pt modelId="{s4}" type="sibTrans" cxnId="{c4}"/>
+  </dgm:ptLst>
+  <dgm:cxnLst>
+    <dgm:cxn modelId="{c1}" srcId="{doc}" destId="{n1}" srcOrd="0" destOrd="0" parTransId="{p1}" sibTransId="{s1}"/>
+    <dgm:cxn modelId="{c2}" srcId="{doc}" destId="{n2}" srcOrd="1" destOrd="0" parTransId="{p2}" sibTransId="{s2}"/>
+    <dgm:cxn modelId="{c3}" srcId="{doc}" destId="{n3}" srcOrd="2" destOrd="0" parTransId="{p3}" sibTransId="{s3}"/>
+    <dgm:cxn modelId="{c4}" srcId="{doc}" destId="{n4}" srcOrd="3" destOrd="0" parTransId="{p4}" sibTransId="{s4}"/>
+  </dgm:cxnLst>
+  <dgm:bg/>
+  <dgm:whole/>
+</dgm:dataModel>
+</file>
+
+<file path=ppt/diagrams/data6.xml><?xml version="1.0" encoding="utf-8"?>
+<dgm:dataModel xmlns:dgm="http://schemas.openxmlformats.org/drawingml/2006/diagram" xmlns:a="http://schemas.openxmlformats.org/drawingml/2006/main" xmlns:r="http://schemas.openxmlformats.org/officeDocument/2006/relationships">
+  <dgm:ptLst>
+    <dgm:pt modelId="{doc}" type="doc">
+      <dgm:prSet loTypeId="test/radial"/>
+    </dgm:pt>
+    <dgm:pt modelId="{n1}">
+      <dgm:prSet/>
+      <dgm:spPr/>
+      <dgm:t>
+        <a:bodyPr/>
+        <a:lstStyle/>
+        <a:p>
+          <a:r>
+            <a:rPr lang="en-US"/>
+            <a:t>Hub</a:t>
+          </a:r>
+        </a:p>
+      </dgm:t>
+    </dgm:pt>
+    <dgm:pt modelId="{p1}" type="parTrans" cxnId="{c1}"/>
+    <dgm:pt modelId="{s1}" type="sibTrans" cxnId="{c1}"/>
+    <dgm:pt modelId="{n2}">
+      <dgm:prSet/>
+      <dgm:spPr/>
+      <dgm:t>
+        <a:bodyPr/>
+        <a:lstStyle/>
+        <a:p>
+          <a:r>
+            <a:rPr lang="en-US"/>
+            <a:t>North</a:t>
+          </a:r>
+        </a:p>
+      </dgm:t>
+    </dgm:pt>
+    <dgm:pt modelId="{p2}" type="parTrans" cxnId="{c2}"/>
+    <dgm:pt modelId="{s2}" type="sibTrans" cxnId="{c2}"/>
+    <dgm:pt modelId="{n3}">
+      <dgm:prSet/>
+      <dgm:spPr/>
+      <dgm:t>
+        <a:bodyPr/>
+        <a:lstStyle/>
+        <a:p>
+          <a:r>
+            <a:rPr lang="en-US"/>
+            <a:t>East</a:t>
+          </a:r>
+        </a:p>
+      </dgm:t>
+    </dgm:pt>
+    <dgm:pt modelId="{p3}" type="parTrans" cxnId="{c3}"/>
+    <dgm:pt modelId="{s3}" type="sibTrans" cxnId="{c3}"/>
+    <dgm:pt modelId="{n4}">
+      <dgm:prSet/>
+      <dgm:spPr/>
+      <dgm:t>
+        <a:bodyPr/>
+        <a:lstStyle/>
+        <a:p>
+          <a:r>
+            <a:rPr lang="en-US"/>
+            <a:t>South</a:t>
+          </a:r>
+        </a:p>
+      </dgm:t>
+    </dgm:pt>
+    <dgm:pt modelId="{p4}" type="parTrans" cxnId="{c4}"/>
+    <dgm:pt modelId="{s4}" type="sibTrans" cxnId="{c4}"/>
+    <dgm:pt modelId="{n5}">
+      <dgm:prSet/>
+      <dgm:spPr/>
+      <dgm:t>
+        <a:bodyPr/>
+        <a:lstStyle/>
+        <a:p>
+          <a:r>
+            <a:rPr lang="en-US"/>
+            <a:t>West</a:t>
+          </a:r>
+        </a:p>
+      </dgm:t>
+    </dgm:pt>
+    <dgm:pt modelId="{p5}" type="parTrans" cxnId="{c5}"/>
+    <dgm:pt modelId="{s5}" type="sibTrans" cxnId="{c5}"/>
+    <dgm:pt modelId="{n6}">
+      <dgm:prSet/>
+      <dgm:spPr/>
+      <dgm:t>
+        <a:bodyPr/>
+        <a:lstStyle/>
+        <a:p>
+          <a:r>
+            <a:rPr lang="en-US"/>
+            <a:t>More</a:t>
+          </a:r>
+        </a:p>
+      </dgm:t>
+    </dgm:pt>
+    <dgm:pt modelId="{p6}" type="parTrans" cxnId="{c6}"/>
+    <dgm:pt modelId="{s6}" type="sibTrans" cxnId="{c6}"/>
+  </dgm:ptLst>
+  <dgm:cxnLst>
+    <dgm:cxn modelId="{c1}" srcId="{doc}" destId="{n1}" srcOrd="0" destOrd="0" parTransId="{p1}" sibTransId="{s1}"/>
+    <dgm:cxn modelId="{c2}" srcId="{n1}" destId="{n2}" srcOrd="0" destOrd="0" parTransId="{p2}" sibTransId="{s2}"/>
+    <dgm:cxn modelId="{c3}" srcId="{n1}" destId="{n3}" srcOrd="1" destOrd="0" parTransId="{p3}" sibTransId="{s3}"/>
+    <dgm:cxn modelId="{c4}" srcId="{n1}" destId="{n4}" srcOrd="2" destOrd="0" parTransId="{p4}" sibTransId="{s4}"/>
+    <dgm:cxn modelId="{c5}" srcId="{n1}" destId="{n5}" srcOrd="3" destOrd="0" parTransId="{p5}" sibTransId="{s5}"/>
+    <dgm:cxn modelId="{c6}" srcId="{n1}" destId="{n6}" srcOrd="4" destOrd="0" parTransId="{p6}" sibTransId="{s6}"/>
+  </dgm:cxnLst>
+  <dgm:bg/>
+  <dgm:whole/>
+</dgm:dataModel>
+</file>
+
+<file path=ppt/diagrams/data7.xml><?xml version="1.0" encoding="utf-8"?>
+<dgm:dataModel xmlns:dgm="http://schemas.openxmlformats.org/drawingml/2006/diagram" xmlns:a="http://schemas.openxmlformats.org/drawingml/2006/main" xmlns:r="http://schemas.openxmlformats.org/officeDocument/2006/relationships">
+  <dgm:ptLst>
+    <dgm:pt modelId="{doc}" type="doc">
+      <dgm:prSet loTypeId="test/pyramid"/>
+    </dgm:pt>
+    <dgm:pt modelId="{n1}">
+      <dgm:prSet/>
+      <dgm:spPr/>
+      <dgm:t>
+        <a:bodyPr/>
+        <a:lstStyle/>
+        <a:p>
+          <a:r>
+            <a:rPr lang="en-US"/>
+            <a:t>Top</a:t>
+          </a:r>
+        </a:p>
+      </dgm:t>
+    </dgm:pt>
+    <dgm:pt modelId="{p1}" type="parTrans" cxnId="{c1}"/>
+    <dgm:pt modelId="{s1}" type="sibTrans" cxnId="{c1}"/>
+    <dgm:pt modelId="{n2}">
+      <dgm:prSet/>
+      <dgm:spPr/>
+      <dgm:t>
+        <a:bodyPr/>
+        <a:lstStyle/>
+        <a:p>
+          <a:r>
+            <a:rPr lang="en-US"/>
+            <a:t>Middle</a:t>
+          </a:r>
+        </a:p>
+      </dgm:t>
+    </dgm:pt>
+    <dgm:pt modelId="{p2}" type="parTrans" cxnId="{c2}"/>
+    <dgm:pt modelId="{s2}" type="sibTrans" cxnId="{c2}"/>
+    <dgm:pt modelId="{n3}">
+      <dgm:prSet/>
+      <dgm:spPr/>
+      <dgm:t>
+        <a:bodyPr/>
+        <a:lstStyle/>
+        <a:p>
+          <a:r>
+            <a:rPr lang="en-US"/>
+            <a:t>Base</a:t>
+          </a:r>
+        </a:p>
+      </dgm:t>
+    </dgm:pt>
+    <dgm:pt modelId="{p3}" type="parTrans" cxnId="{c3}"/>
+    <dgm:pt modelId="{s3}" type="sibTrans" cxnId="{c3}"/>
+  </dgm:ptLst>
+  <dgm:cxnLst>
+    <dgm:cxn modelId="{c1}" srcId="{doc}" destId="{n1}" srcOrd="0" destOrd="0" parTransId="{p1}" sibTransId="{s1}"/>
+    <dgm:cxn modelId="{c2}" srcId="{doc}" destId="{n2}" srcOrd="1" destOrd="0" parTransId="{p2}" sibTransId="{s2}"/>
+    <dgm:cxn modelId="{c3}" srcId="{doc}" destId="{n3}" srcOrd="2" destOrd="0" parTransId="{p3}" sibTransId="{s3}"/>
+  </dgm:cxnLst>
+  <dgm:bg/>
+  <dgm:whole/>
+</dgm:dataModel>
+</file>
+
+<file path=ppt/diagrams/data8.xml><?xml version="1.0" encoding="utf-8"?>
+<dgm:dataModel xmlns:dgm="http://schemas.openxmlformats.org/drawingml/2006/diagram" xmlns:a="http://schemas.openxmlformats.org/drawingml/2006/main" xmlns:r="http://schemas.openxmlformats.org/officeDocument/2006/relationships">
+  <dgm:ptLst>
+    <dgm:pt modelId="{doc}" type="doc">
+      <dgm:prSet loTypeId="test/pyramid"/>
+    </dgm:pt>
+    <dgm:pt modelId="{n1}">
+      <dgm:prSet/>
+      <dgm:spPr/>
+      <dgm:t>
+        <a:bodyPr/>
+        <a:lstStyle/>
+        <a:p>
+          <a:r>
+            <a:rPr lang="en-US"/>
+            <a:t>Wide</a:t>
+          </a:r>
+        </a:p>
+      </dgm:t>
+    </dgm:pt>
+    <dgm:pt modelId="{p1}" type="parTrans" cxnId="{c1}"/>
+    <dgm:pt modelId="{s1}" type="sibTrans" cxnId="{c1}"/>
+    <dgm:pt modelId="{n2}">
+      <dgm:prSet/>
+      <dgm:spPr/>
+      <dgm:t>
+        <a:bodyPr/>
+        <a:lstStyle/>
+        <a:p>
+          <a:r>
+            <a:rPr lang="en-US"/>
+            <a:t>Narrow</a:t>
+          </a:r>
+        </a:p>
+      </dgm:t>
+    </dgm:pt>
+    <dgm:pt modelId="{p2}" type="parTrans" cxnId="{c2}"/>
+    <dgm:pt modelId="{s2}" type="sibTrans" cxnId="{c2}"/>
+  </dgm:ptLst>
+  <dgm:cxnLst>
+    <dgm:cxn modelId="{c1}" srcId="{doc}" destId="{n1}" srcOrd="0" destOrd="0" parTransId="{p1}" sibTransId="{s1}"/>
+    <dgm:cxn modelId="{c2}" srcId="{doc}" destId="{n2}" srcOrd="1" destOrd="0" parTransId="{p2}" sibTransId="{s2}"/>
+  </dgm:cxnLst>
+  <dgm:bg/>
+  <dgm:whole/>
 </dgm:dataModel>
 </file>
 
@@ -709,6 +1140,184 @@
 </dgm:layoutDef>
 </file>
 
+<file path=ppt/diagrams/layout5.xml><?xml version="1.0" encoding="utf-8"?>
+<dgm:layoutDef xmlns:dgm="http://schemas.openxmlformats.org/drawingml/2006/diagram" xmlns:a="http://schemas.openxmlformats.org/drawingml/2006/main" xmlns:r="http://schemas.openxmlformats.org/officeDocument/2006/relationships" uniqueId="test/cycle">
+  <dgm:layoutNode name="diagram">
+    <dgm:alg type="cycle">
+      <dgm:param type="stAng" val="0"/>
+      <dgm:param type="spanAng" val="360"/>
+    </dgm:alg>
+    <dgm:shape/>
+    <dgm:presOf/>
+    <dgm:constrLst>
+      <dgm:constr type="w" for="ch" ptType="node" refType="w"/>
+      <dgm:constr type="h" for="ch" ptType="node" refType="w" refFor="ch" refPtType="node"/>
+      <dgm:constr type="sibSp" refType="w" refFor="ch" refPtType="node" fact="0.4"/>
+      <dgm:constr type="h" for="ch" ptType="sibTrans" refType="w" refFor="ch" refPtType="node" fact="0.15"/>
+      <dgm:constr type="primFontSz" for="ch" ptType="node" op="equ" val="65"/>
+    </dgm:constrLst>
+    <dgm:forEach name="nodes" axis="ch" ptType="node">
+      <dgm:layoutNode name="node">
+        <dgm:alg type="tx"/>
+        <dgm:shape type="ellipse"/>
+        <dgm:presOf axis="desOrSelf" ptType="node"/>
+        <dgm:constrLst>
+          <dgm:constr type="tMarg" refType="primFontSz" fact="0.3"/>
+          <dgm:constr type="bMarg" refType="primFontSz" fact="0.3"/>
+          <dgm:constr type="lMarg" refType="primFontSz" fact="0.3"/>
+          <dgm:constr type="rMarg" refType="primFontSz" fact="0.3"/>
+        </dgm:constrLst>
+        <dgm:ruleLst>
+          <dgm:rule type="primFontSz" val="5" fact="NaN" max="NaN"/>
+        </dgm:ruleLst>
+      </dgm:layoutNode>
+      <dgm:forEach name="arrows" axis="followSib" ptType="sibTrans" hideLastTrans="0" cnt="1">
+        <dgm:layoutNode name="arrow">
+          <dgm:alg type="conn"/>
+          <dgm:shape type="conn"/>
+          <dgm:presOf axis="self"/>
+          <dgm:constrLst>
+            <dgm:constr type="connDist"/>
+            <dgm:constr type="begPad" refType="connDist" fact="0.1"/>
+            <dgm:constr type="endPad" refType="connDist" fact="0.1"/>
+          </dgm:constrLst>
+        </dgm:layoutNode>
+      </dgm:forEach>
+    </dgm:forEach>
+  </dgm:layoutNode>
+</dgm:layoutDef>
+</file>
+
+<file path=ppt/diagrams/layout6.xml><?xml version="1.0" encoding="utf-8"?>
+<dgm:layoutDef xmlns:dgm="http://schemas.openxmlformats.org/drawingml/2006/diagram" xmlns:a="http://schemas.openxmlformats.org/drawingml/2006/main" xmlns:r="http://schemas.openxmlformats.org/officeDocument/2006/relationships" uniqueId="test/radial">
+  <dgm:layoutNode name="diagram">
+    <dgm:alg type="cycle">
+      <dgm:param type="stAng" val="0"/>
+      <dgm:param type="spanAng" val="360"/>
+      <dgm:param type="ctrShpMap" val="fNode"/>
+    </dgm:alg>
+    <dgm:shape/>
+    <dgm:presOf/>
+    <dgm:constrLst>
+      <dgm:constr type="w" for="ch" forName="centre" refType="w"/>
+      <dgm:constr type="w" for="ch" forName="node" refType="w" refFor="ch" refForName="centre" fact="0.6"/>
+      <dgm:constr type="sp" refType="w" refFor="ch" refForName="centre" fact="0.25"/>
+      <dgm:constr type="sibSp" refType="w" refFor="ch" refForName="node" fact="0.1"/>
+      <dgm:constr type="primFontSz" for="ch" forName="node" op="equ" val="65"/>
+    </dgm:constrLst>
+    <dgm:forEach name="first" axis="ch" ptType="node" cnt="1">
+      <dgm:layoutNode name="centre">
+        <dgm:alg type="tx"/>
+        <dgm:shape type="ellipse"/>
+        <dgm:presOf axis="self"/>
+        <dgm:constrLst>
+          <dgm:constr type="h" refType="w"/>
+          <dgm:constr type="primFontSz" val="65"/>
+          <dgm:constr type="tMarg" refType="primFontSz" fact="0.3"/>
+          <dgm:constr type="bMarg" refType="primFontSz" fact="0.3"/>
+          <dgm:constr type="lMarg" refType="primFontSz" fact="0.3"/>
+          <dgm:constr type="rMarg" refType="primFontSz" fact="0.3"/>
+        </dgm:constrLst>
+        <dgm:ruleLst>
+          <dgm:rule type="primFontSz" val="5" fact="NaN" max="NaN"/>
+        </dgm:ruleLst>
+      </dgm:layoutNode>
+      <dgm:forEach name="kids" axis="ch">
+        <dgm:forEach name="lines" axis="self" ptType="parTrans">
+          <dgm:layoutNode name="line">
+            <dgm:alg type="conn">
+              <dgm:param type="dim" val="1D"/>
+              <dgm:param type="endSty" val="noArr"/>
+            </dgm:alg>
+            <dgm:shape type="conn" zOrderOff="-99"/>
+            <dgm:presOf axis="self"/>
+          </dgm:layoutNode>
+        </dgm:forEach>
+        <dgm:forEach name="each" axis="self" ptType="node">
+          <dgm:layoutNode name="node">
+            <dgm:alg type="tx"/>
+            <dgm:shape type="ellipse"/>
+            <dgm:presOf axis="desOrSelf" ptType="node"/>
+            <dgm:constrLst>
+              <dgm:constr type="h" refType="w"/>
+              <dgm:constr type="tMarg" refType="primFontSz" fact="0.3"/>
+              <dgm:constr type="bMarg" refType="primFontSz" fact="0.3"/>
+              <dgm:constr type="lMarg" refType="primFontSz" fact="0.3"/>
+              <dgm:constr type="rMarg" refType="primFontSz" fact="0.3"/>
+            </dgm:constrLst>
+            <dgm:ruleLst>
+              <dgm:rule type="primFontSz" val="5" fact="NaN" max="NaN"/>
+            </dgm:ruleLst>
+          </dgm:layoutNode>
+        </dgm:forEach>
+      </dgm:forEach>
+    </dgm:forEach>
+  </dgm:layoutNode>
+</dgm:layoutDef>
+</file>
+
+<file path=ppt/diagrams/layout7.xml><?xml version="1.0" encoding="utf-8"?>
+<dgm:layoutDef xmlns:dgm="http://schemas.openxmlformats.org/drawingml/2006/diagram" xmlns:a="http://schemas.openxmlformats.org/drawingml/2006/main" xmlns:r="http://schemas.openxmlformats.org/officeDocument/2006/relationships" uniqueId="test/pyramid">
+  <dgm:layoutNode name="diagram">
+    <dgm:alg type="pyra">
+      <dgm:param type="linDir" val="fromT"/>
+    </dgm:alg>
+    <dgm:shape/>
+    <dgm:presOf/>
+    <dgm:constrLst>
+      <dgm:constr type="primFontSz" for="ch" ptType="node" op="equ" val="65"/>
+    </dgm:constrLst>
+    <dgm:forEach name="levels" axis="ch" ptType="node">
+      <dgm:layoutNode name="level">
+        <dgm:alg type="tx"/>
+        <dgm:shape type="trapezoid"/>
+        <dgm:presOf axis="desOrSelf" ptType="node"/>
+        <dgm:constrLst>
+          <dgm:constr type="tMarg" refType="primFontSz" fact="0.3"/>
+          <dgm:constr type="bMarg" refType="primFontSz" fact="0.3"/>
+          <dgm:constr type="lMarg" refType="primFontSz" fact="0.3"/>
+          <dgm:constr type="rMarg" refType="primFontSz" fact="0.3"/>
+        </dgm:constrLst>
+        <dgm:ruleLst>
+          <dgm:rule type="primFontSz" val="5" fact="NaN" max="NaN"/>
+        </dgm:ruleLst>
+      </dgm:layoutNode>
+    </dgm:forEach>
+  </dgm:layoutNode>
+</dgm:layoutDef>
+</file>
+
+<file path=ppt/diagrams/layout8.xml><?xml version="1.0" encoding="utf-8"?>
+<dgm:layoutDef xmlns:dgm="http://schemas.openxmlformats.org/drawingml/2006/diagram" xmlns:a="http://schemas.openxmlformats.org/drawingml/2006/main" xmlns:r="http://schemas.openxmlformats.org/officeDocument/2006/relationships" uniqueId="test/pyramid">
+  <dgm:layoutNode name="diagram">
+    <dgm:alg type="pyra">
+      <dgm:param type="linDir" val="fromT"/>
+    </dgm:alg>
+    <dgm:shape/>
+    <dgm:presOf/>
+    <dgm:constrLst>
+      <dgm:constr type="primFontSz" for="ch" ptType="node" op="equ" val="65"/>
+    </dgm:constrLst>
+    <dgm:forEach name="levels" axis="ch" ptType="node">
+      <dgm:layoutNode name="level">
+        <dgm:alg type="tx"/>
+        <dgm:shape type="trapezoid" rot="180"/>
+        <dgm:presOf axis="desOrSelf" ptType="node"/>
+        <dgm:constrLst>
+          <dgm:constr type="tMarg" refType="primFontSz" fact="0.3"/>
+          <dgm:constr type="bMarg" refType="primFontSz" fact="0.3"/>
+          <dgm:constr type="lMarg" refType="primFontSz" fact="0.3"/>
+          <dgm:constr type="rMarg" refType="primFontSz" fact="0.3"/>
+        </dgm:constrLst>
+        <dgm:ruleLst>
+          <dgm:rule type="primFontSz" val="5" fact="NaN" max="NaN"/>
+        </dgm:ruleLst>
+      </dgm:layoutNode>
+    </dgm:forEach>
+  </dgm:layoutNode>
+</dgm:layoutDef>
+</file>
+
 <file path=ppt/diagrams/quickStyle1.xml><?xml version="1.0" encoding="utf-8"?>
 <dgm:styleDef xmlns:dgm="http://schemas.openxmlformats.org/drawingml/2006/diagram" xmlns:a="http://schemas.openxmlformats.org/drawingml/2006/main" xmlns:r="http://schemas.openxmlformats.org/officeDocument/2006/relationships" uniqueId="test/style">
   <dgm:styleLbl name="node1">
@@ -857,6 +1466,202 @@
 </file>
 
 <file path=ppt/diagrams/quickStyle4.xml><?xml version="1.0" encoding="utf-8"?>
+<dgm:styleDef xmlns:dgm="http://schemas.openxmlformats.org/drawingml/2006/diagram" xmlns:a="http://schemas.openxmlformats.org/drawingml/2006/main" xmlns:r="http://schemas.openxmlformats.org/officeDocument/2006/relationships" uniqueId="test/style">
+  <dgm:styleLbl name="node1">
+    <dgm:style>
+      <a:lnRef idx="2">
+        <a:scrgbClr r="0" g="0" b="0"/>
+      </a:lnRef>
+      <a:fillRef idx="1">
+        <a:scrgbClr r="0" g="0" b="0"/>
+      </a:fillRef>
+      <a:effectRef idx="0">
+        <a:scrgbClr r="0" g="0" b="0"/>
+      </a:effectRef>
+      <a:fontRef idx="minor">
+        <a:schemeClr val="lt1"/>
+      </a:fontRef>
+    </dgm:style>
+  </dgm:styleLbl>
+  <dgm:styleLbl name="sibTrans2D1">
+    <dgm:style>
+      <a:lnRef idx="0">
+        <a:scrgbClr r="0" g="0" b="0"/>
+      </a:lnRef>
+      <a:fillRef idx="1">
+        <a:scrgbClr r="0" g="0" b="0"/>
+      </a:fillRef>
+      <a:effectRef idx="0">
+        <a:scrgbClr r="0" g="0" b="0"/>
+      </a:effectRef>
+      <a:fontRef idx="minor"/>
+    </dgm:style>
+  </dgm:styleLbl>
+  <dgm:styleLbl name="parChTrans1D1">
+    <dgm:style>
+      <a:lnRef idx="2">
+        <a:scrgbClr r="0" g="0" b="0"/>
+      </a:lnRef>
+      <a:fillRef idx="0">
+        <a:scrgbClr r="0" g="0" b="0"/>
+      </a:fillRef>
+      <a:effectRef idx="0">
+        <a:scrgbClr r="0" g="0" b="0"/>
+      </a:effectRef>
+      <a:fontRef idx="minor"/>
+    </dgm:style>
+  </dgm:styleLbl>
+</dgm:styleDef>
+</file>
+
+<file path=ppt/diagrams/quickStyle5.xml><?xml version="1.0" encoding="utf-8"?>
+<dgm:styleDef xmlns:dgm="http://schemas.openxmlformats.org/drawingml/2006/diagram" xmlns:a="http://schemas.openxmlformats.org/drawingml/2006/main" xmlns:r="http://schemas.openxmlformats.org/officeDocument/2006/relationships" uniqueId="test/style">
+  <dgm:styleLbl name="node1">
+    <dgm:style>
+      <a:lnRef idx="2">
+        <a:scrgbClr r="0" g="0" b="0"/>
+      </a:lnRef>
+      <a:fillRef idx="1">
+        <a:scrgbClr r="0" g="0" b="0"/>
+      </a:fillRef>
+      <a:effectRef idx="0">
+        <a:scrgbClr r="0" g="0" b="0"/>
+      </a:effectRef>
+      <a:fontRef idx="minor">
+        <a:schemeClr val="lt1"/>
+      </a:fontRef>
+    </dgm:style>
+  </dgm:styleLbl>
+  <dgm:styleLbl name="sibTrans2D1">
+    <dgm:style>
+      <a:lnRef idx="0">
+        <a:scrgbClr r="0" g="0" b="0"/>
+      </a:lnRef>
+      <a:fillRef idx="1">
+        <a:scrgbClr r="0" g="0" b="0"/>
+      </a:fillRef>
+      <a:effectRef idx="0">
+        <a:scrgbClr r="0" g="0" b="0"/>
+      </a:effectRef>
+      <a:fontRef idx="minor"/>
+    </dgm:style>
+  </dgm:styleLbl>
+  <dgm:styleLbl name="parChTrans1D1">
+    <dgm:style>
+      <a:lnRef idx="2">
+        <a:scrgbClr r="0" g="0" b="0"/>
+      </a:lnRef>
+      <a:fillRef idx="0">
+        <a:scrgbClr r="0" g="0" b="0"/>
+      </a:fillRef>
+      <a:effectRef idx="0">
+        <a:scrgbClr r="0" g="0" b="0"/>
+      </a:effectRef>
+      <a:fontRef idx="minor"/>
+    </dgm:style>
+  </dgm:styleLbl>
+</dgm:styleDef>
+</file>
+
+<file path=ppt/diagrams/quickStyle6.xml><?xml version="1.0" encoding="utf-8"?>
+<dgm:styleDef xmlns:dgm="http://schemas.openxmlformats.org/drawingml/2006/diagram" xmlns:a="http://schemas.openxmlformats.org/drawingml/2006/main" xmlns:r="http://schemas.openxmlformats.org/officeDocument/2006/relationships" uniqueId="test/style">
+  <dgm:styleLbl name="node1">
+    <dgm:style>
+      <a:lnRef idx="2">
+        <a:scrgbClr r="0" g="0" b="0"/>
+      </a:lnRef>
+      <a:fillRef idx="1">
+        <a:scrgbClr r="0" g="0" b="0"/>
+      </a:fillRef>
+      <a:effectRef idx="0">
+        <a:scrgbClr r="0" g="0" b="0"/>
+      </a:effectRef>
+      <a:fontRef idx="minor">
+        <a:schemeClr val="lt1"/>
+      </a:fontRef>
+    </dgm:style>
+  </dgm:styleLbl>
+  <dgm:styleLbl name="sibTrans2D1">
+    <dgm:style>
+      <a:lnRef idx="0">
+        <a:scrgbClr r="0" g="0" b="0"/>
+      </a:lnRef>
+      <a:fillRef idx="1">
+        <a:scrgbClr r="0" g="0" b="0"/>
+      </a:fillRef>
+      <a:effectRef idx="0">
+        <a:scrgbClr r="0" g="0" b="0"/>
+      </a:effectRef>
+      <a:fontRef idx="minor"/>
+    </dgm:style>
+  </dgm:styleLbl>
+  <dgm:styleLbl name="parChTrans1D1">
+    <dgm:style>
+      <a:lnRef idx="2">
+        <a:scrgbClr r="0" g="0" b="0"/>
+      </a:lnRef>
+      <a:fillRef idx="0">
+        <a:scrgbClr r="0" g="0" b="0"/>
+      </a:fillRef>
+      <a:effectRef idx="0">
+        <a:scrgbClr r="0" g="0" b="0"/>
+      </a:effectRef>
+      <a:fontRef idx="minor"/>
+    </dgm:style>
+  </dgm:styleLbl>
+</dgm:styleDef>
+</file>
+
+<file path=ppt/diagrams/quickStyle7.xml><?xml version="1.0" encoding="utf-8"?>
+<dgm:styleDef xmlns:dgm="http://schemas.openxmlformats.org/drawingml/2006/diagram" xmlns:a="http://schemas.openxmlformats.org/drawingml/2006/main" xmlns:r="http://schemas.openxmlformats.org/officeDocument/2006/relationships" uniqueId="test/style">
+  <dgm:styleLbl name="node1">
+    <dgm:style>
+      <a:lnRef idx="2">
+        <a:scrgbClr r="0" g="0" b="0"/>
+      </a:lnRef>
+      <a:fillRef idx="1">
+        <a:scrgbClr r="0" g="0" b="0"/>
+      </a:fillRef>
+      <a:effectRef idx="0">
+        <a:scrgbClr r="0" g="0" b="0"/>
+      </a:effectRef>
+      <a:fontRef idx="minor">
+        <a:schemeClr val="lt1"/>
+      </a:fontRef>
+    </dgm:style>
+  </dgm:styleLbl>
+  <dgm:styleLbl name="sibTrans2D1">
+    <dgm:style>
+      <a:lnRef idx="0">
+        <a:scrgbClr r="0" g="0" b="0"/>
+      </a:lnRef>
+      <a:fillRef idx="1">
+        <a:scrgbClr r="0" g="0" b="0"/>
+      </a:fillRef>
+      <a:effectRef idx="0">
+        <a:scrgbClr r="0" g="0" b="0"/>
+      </a:effectRef>
+      <a:fontRef idx="minor"/>
+    </dgm:style>
+  </dgm:styleLbl>
+  <dgm:styleLbl name="parChTrans1D1">
+    <dgm:style>
+      <a:lnRef idx="2">
+        <a:scrgbClr r="0" g="0" b="0"/>
+      </a:lnRef>
+      <a:fillRef idx="0">
+        <a:scrgbClr r="0" g="0" b="0"/>
+      </a:fillRef>
+      <a:effectRef idx="0">
+        <a:scrgbClr r="0" g="0" b="0"/>
+      </a:effectRef>
+      <a:fontRef idx="minor"/>
+    </dgm:style>
+  </dgm:styleLbl>
+</dgm:styleDef>
+</file>
+
+<file path=ppt/diagrams/quickStyle8.xml><?xml version="1.0" encoding="utf-8"?>
 <dgm:styleDef xmlns:dgm="http://schemas.openxmlformats.org/drawingml/2006/diagram" xmlns:a="http://schemas.openxmlformats.org/drawingml/2006/main" xmlns:r="http://schemas.openxmlformats.org/officeDocument/2006/relationships" uniqueId="test/style">
   <dgm:styleLbl name="node1">
     <dgm:style>
@@ -1042,6 +1847,130 @@
       <p:graphicFrame>
         <p:nvGraphicFramePr>
           <p:cNvPr id="2" name="Diagram 4"/>
+          <p:cNvGraphicFramePr/>
+          <p:nvPr/>
+        </p:nvGraphicFramePr>
+        <p:xfrm>
+          <a:off x="1524000" y="571500"/>
+          <a:ext cx="6096000" cy="4000500"/>
+        </p:xfrm>
+        <a:graphic>
+          <a:graphicData uri="http://schemas.openxmlformats.org/drawingml/2006/diagram">
+            <dgm:relIds xmlns:dgm="http://schemas.openxmlformats.org/drawingml/2006/diagram" r:dm="rId2" r:lo="rId3" r:qs="rId4" r:cs="rId5"/>
+          </a:graphicData>
+        </a:graphic>
+      </p:graphicFrame>
+    </p:spTree>
+  </p:cSld>
+</p:sld>
+</file>
+
+<file path=ppt/slides/slide5.xml><?xml version="1.0" encoding="utf-8"?>
+<p:sld xmlns:a="http://schemas.openxmlformats.org/drawingml/2006/main" xmlns:r="http://schemas.openxmlformats.org/officeDocument/2006/relationships" xmlns:p="http://schemas.openxmlformats.org/presentationml/2006/main">
+  <p:cSld>
+    <p:spTree>
+      <p:nvGrpSpPr>
+        <p:cNvPr id="1" name=""/>
+        <p:cNvGrpSpPr/>
+        <p:nvPr/>
+      </p:nvGrpSpPr>
+      <p:grpSpPr/>
+      <p:graphicFrame>
+        <p:nvGraphicFramePr>
+          <p:cNvPr id="2" name="Diagram 5"/>
+          <p:cNvGraphicFramePr/>
+          <p:nvPr/>
+        </p:nvGraphicFramePr>
+        <p:xfrm>
+          <a:off x="1524000" y="571500"/>
+          <a:ext cx="6096000" cy="4000500"/>
+        </p:xfrm>
+        <a:graphic>
+          <a:graphicData uri="http://schemas.openxmlformats.org/drawingml/2006/diagram">
+            <dgm:relIds xmlns:dgm="http://schemas.openxmlformats.org/drawingml/2006/diagram" r:dm="rId2" r:lo="rId3" r:qs="rId4" r:cs="rId5"/>
+          </a:graphicData>
+        </a:graphic>
+      </p:graphicFrame>
+    </p:spTree>
+  </p:cSld>
+</p:sld>
+</file>
+
+<file path=ppt/slides/slide6.xml><?xml version="1.0" encoding="utf-8"?>
+<p:sld xmlns:a="http://schemas.openxmlformats.org/drawingml/2006/main" xmlns:r="http://schemas.openxmlformats.org/officeDocument/2006/relationships" xmlns:p="http://schemas.openxmlformats.org/presentationml/2006/main">
+  <p:cSld>
+    <p:spTree>
+      <p:nvGrpSpPr>
+        <p:cNvPr id="1" name=""/>
+        <p:cNvGrpSpPr/>
+        <p:nvPr/>
+      </p:nvGrpSpPr>
+      <p:grpSpPr/>
+      <p:graphicFrame>
+        <p:nvGraphicFramePr>
+          <p:cNvPr id="2" name="Diagram 6"/>
+          <p:cNvGraphicFramePr/>
+          <p:nvPr/>
+        </p:nvGraphicFramePr>
+        <p:xfrm>
+          <a:off x="1524000" y="571500"/>
+          <a:ext cx="6096000" cy="4000500"/>
+        </p:xfrm>
+        <a:graphic>
+          <a:graphicData uri="http://schemas.openxmlformats.org/drawingml/2006/diagram">
+            <dgm:relIds xmlns:dgm="http://schemas.openxmlformats.org/drawingml/2006/diagram" r:dm="rId2" r:lo="rId3" r:qs="rId4" r:cs="rId5"/>
+          </a:graphicData>
+        </a:graphic>
+      </p:graphicFrame>
+    </p:spTree>
+  </p:cSld>
+</p:sld>
+</file>
+
+<file path=ppt/slides/slide7.xml><?xml version="1.0" encoding="utf-8"?>
+<p:sld xmlns:a="http://schemas.openxmlformats.org/drawingml/2006/main" xmlns:r="http://schemas.openxmlformats.org/officeDocument/2006/relationships" xmlns:p="http://schemas.openxmlformats.org/presentationml/2006/main">
+  <p:cSld>
+    <p:spTree>
+      <p:nvGrpSpPr>
+        <p:cNvPr id="1" name=""/>
+        <p:cNvGrpSpPr/>
+        <p:nvPr/>
+      </p:nvGrpSpPr>
+      <p:grpSpPr/>
+      <p:graphicFrame>
+        <p:nvGraphicFramePr>
+          <p:cNvPr id="2" name="Diagram 7"/>
+          <p:cNvGraphicFramePr/>
+          <p:nvPr/>
+        </p:nvGraphicFramePr>
+        <p:xfrm>
+          <a:off x="1524000" y="571500"/>
+          <a:ext cx="6096000" cy="4000500"/>
+        </p:xfrm>
+        <a:graphic>
+          <a:graphicData uri="http://schemas.openxmlformats.org/drawingml/2006/diagram">
+            <dgm:relIds xmlns:dgm="http://schemas.openxmlformats.org/drawingml/2006/diagram" r:dm="rId2" r:lo="rId3" r:qs="rId4" r:cs="rId5"/>
+          </a:graphicData>
+        </a:graphic>
+      </p:graphicFrame>
+    </p:spTree>
+  </p:cSld>
+</p:sld>
+</file>
+
+<file path=ppt/slides/slide8.xml><?xml version="1.0" encoding="utf-8"?>
+<p:sld xmlns:a="http://schemas.openxmlformats.org/drawingml/2006/main" xmlns:r="http://schemas.openxmlformats.org/officeDocument/2006/relationships" xmlns:p="http://schemas.openxmlformats.org/presentationml/2006/main">
+  <p:cSld>
+    <p:spTree>
+      <p:nvGrpSpPr>
+        <p:cNvPr id="1" name=""/>
+        <p:cNvGrpSpPr/>
+        <p:nvPr/>
+      </p:nvGrpSpPr>
+      <p:grpSpPr/>
+      <p:graphicFrame>
+        <p:nvGraphicFramePr>
+          <p:cNvPr id="2" name="Diagram 8"/>
           <p:cNvGraphicFramePr/>
           <p:nvPr/>
         </p:nvGraphicFramePr>

--- a/tests/data/smartart.pptx
+++ b/tests/data/smartart.pptx
@@ -13,6 +13,8 @@
     <p:sldId id="261" r:id="rId7"/>
     <p:sldId id="262" r:id="rId8"/>
     <p:sldId id="263" r:id="rId9"/>
+    <p:sldId id="264" r:id="rId10"/>
+    <p:sldId id="265" r:id="rId11"/>
   </p:sldIdLst>
   <p:sldSz cx="9144000" cy="5143500"/>
 </p:presentation>
@@ -47,6 +49,35 @@
 </dgm:colorsDef>
 </file>
 
+<file path=ppt/diagrams/colors10.xml><?xml version="1.0" encoding="utf-8"?>
+<dgm:colorsDef xmlns:dgm="http://schemas.openxmlformats.org/drawingml/2006/diagram" xmlns:a="http://schemas.openxmlformats.org/drawingml/2006/main" xmlns:r="http://schemas.openxmlformats.org/officeDocument/2006/relationships" uniqueId="test/colors">
+  <dgm:styleLbl name="node1">
+    <dgm:fillClrLst meth="repeat">
+      <a:schemeClr val="accent1"/>
+    </dgm:fillClrLst>
+    <dgm:linClrLst meth="repeat">
+      <a:schemeClr val="lt1"/>
+    </dgm:linClrLst>
+    <dgm:txFillClrLst meth="repeat">
+      <a:schemeClr val="lt1"/>
+    </dgm:txFillClrLst>
+  </dgm:styleLbl>
+  <dgm:styleLbl name="sibTrans2D1">
+    <dgm:fillClrLst meth="repeat">
+      <a:schemeClr val="accent2"/>
+    </dgm:fillClrLst>
+    <dgm:linClrLst meth="repeat">
+      <a:schemeClr val="accent2"/>
+    </dgm:linClrLst>
+  </dgm:styleLbl>
+  <dgm:styleLbl name="parChTrans1D1">
+    <dgm:linClrLst meth="repeat">
+      <a:schemeClr val="accent6"/>
+    </dgm:linClrLst>
+  </dgm:styleLbl>
+</dgm:colorsDef>
+</file>
+
 <file path=ppt/diagrams/colors2.xml><?xml version="1.0" encoding="utf-8"?>
 <dgm:colorsDef xmlns:dgm="http://schemas.openxmlformats.org/drawingml/2006/diagram" xmlns:a="http://schemas.openxmlformats.org/drawingml/2006/main" xmlns:r="http://schemas.openxmlformats.org/officeDocument/2006/relationships" uniqueId="test/colors">
   <dgm:styleLbl name="node1">
@@ -222,6 +253,35 @@
 </file>
 
 <file path=ppt/diagrams/colors8.xml><?xml version="1.0" encoding="utf-8"?>
+<dgm:colorsDef xmlns:dgm="http://schemas.openxmlformats.org/drawingml/2006/diagram" xmlns:a="http://schemas.openxmlformats.org/drawingml/2006/main" xmlns:r="http://schemas.openxmlformats.org/officeDocument/2006/relationships" uniqueId="test/colors">
+  <dgm:styleLbl name="node1">
+    <dgm:fillClrLst meth="repeat">
+      <a:schemeClr val="accent1"/>
+    </dgm:fillClrLst>
+    <dgm:linClrLst meth="repeat">
+      <a:schemeClr val="lt1"/>
+    </dgm:linClrLst>
+    <dgm:txFillClrLst meth="repeat">
+      <a:schemeClr val="lt1"/>
+    </dgm:txFillClrLst>
+  </dgm:styleLbl>
+  <dgm:styleLbl name="sibTrans2D1">
+    <dgm:fillClrLst meth="repeat">
+      <a:schemeClr val="accent2"/>
+    </dgm:fillClrLst>
+    <dgm:linClrLst meth="repeat">
+      <a:schemeClr val="accent2"/>
+    </dgm:linClrLst>
+  </dgm:styleLbl>
+  <dgm:styleLbl name="parChTrans1D1">
+    <dgm:linClrLst meth="repeat">
+      <a:schemeClr val="accent6"/>
+    </dgm:linClrLst>
+  </dgm:styleLbl>
+</dgm:colorsDef>
+</file>
+
+<file path=ppt/diagrams/colors9.xml><?xml version="1.0" encoding="utf-8"?>
 <dgm:colorsDef xmlns:dgm="http://schemas.openxmlformats.org/drawingml/2006/diagram" xmlns:a="http://schemas.openxmlformats.org/drawingml/2006/main" xmlns:r="http://schemas.openxmlformats.org/officeDocument/2006/relationships" uniqueId="test/colors">
   <dgm:styleLbl name="node1">
     <dgm:fillClrLst meth="repeat">
@@ -343,6 +403,65 @@
     <dgm:cxn modelId="{c3}" srcId="{doc}" destId="{n3}" srcOrd="2" destOrd="0" parTransId="{p3}" sibTransId="{s3}"/>
     <dgm:cxn modelId="{c4}" srcId="{doc}" destId="{n4}" srcOrd="3" destOrd="0" parTransId="{p4}" sibTransId="{s4}"/>
     <dgm:cxn modelId="{c5}" srcId="{doc}" destId="{n5}" srcOrd="4" destOrd="0" parTransId="{p5}" sibTransId="{s5}"/>
+  </dgm:cxnLst>
+  <dgm:bg/>
+  <dgm:whole/>
+</dgm:dataModel>
+</file>
+
+<file path=ppt/diagrams/data10.xml><?xml version="1.0" encoding="utf-8"?>
+<dgm:dataModel xmlns:dgm="http://schemas.openxmlformats.org/drawingml/2006/diagram" xmlns:a="http://schemas.openxmlformats.org/drawingml/2006/main" xmlns:r="http://schemas.openxmlformats.org/officeDocument/2006/relationships">
+  <dgm:ptLst>
+    <dgm:pt modelId="{doc}" type="doc">
+      <dgm:prSet loTypeId="test/pictures"/>
+    </dgm:pt>
+    <dgm:pt modelId="{n1}">
+      <dgm:prSet/>
+      <dgm:spPr/>
+      <dgm:t>
+        <a:bodyPr/>
+        <a:lstStyle/>
+        <a:p>
+          <a:r>
+            <a:rPr lang="en-US"/>
+            <a:t>Pictured</a:t>
+          </a:r>
+        </a:p>
+      </dgm:t>
+    </dgm:pt>
+    <dgm:pt modelId="{p1}" type="parTrans" cxnId="{c1}"/>
+    <dgm:pt modelId="{s1}" type="sibTrans" cxnId="{c1}"/>
+    <dgm:pt modelId="{q1}" type="pres">
+      <dgm:prSet presAssocID="{n1}" presName="pic"/>
+      <dgm:spPr>
+        <a:blipFill>
+          <a:blip r:embed="rId1"/>
+          <a:stretch>
+            <a:fillRect/>
+          </a:stretch>
+        </a:blipFill>
+      </dgm:spPr>
+    </dgm:pt>
+    <dgm:pt modelId="{n2}">
+      <dgm:prSet/>
+      <dgm:spPr/>
+      <dgm:t>
+        <a:bodyPr/>
+        <a:lstStyle/>
+        <a:p>
+          <a:r>
+            <a:rPr lang="en-US"/>
+            <a:t>Placeholder</a:t>
+          </a:r>
+        </a:p>
+      </dgm:t>
+    </dgm:pt>
+    <dgm:pt modelId="{p2}" type="parTrans" cxnId="{c2}"/>
+    <dgm:pt modelId="{s2}" type="sibTrans" cxnId="{c2}"/>
+  </dgm:ptLst>
+  <dgm:cxnLst>
+    <dgm:cxn modelId="{c1}" srcId="{doc}" destId="{n1}" srcOrd="0" destOrd="0" parTransId="{p1}" sibTransId="{s1}"/>
+    <dgm:cxn modelId="{c2}" srcId="{doc}" destId="{n2}" srcOrd="1" destOrd="0" parTransId="{p2}" sibTransId="{s2}"/>
   </dgm:cxnLst>
   <dgm:bg/>
   <dgm:whole/>
@@ -875,6 +994,255 @@
   <dgm:cxnLst>
     <dgm:cxn modelId="{c1}" srcId="{doc}" destId="{n1}" srcOrd="0" destOrd="0" parTransId="{p1}" sibTransId="{s1}"/>
     <dgm:cxn modelId="{c2}" srcId="{doc}" destId="{n2}" srcOrd="1" destOrd="0" parTransId="{p2}" sibTransId="{s2}"/>
+  </dgm:cxnLst>
+  <dgm:bg/>
+  <dgm:whole/>
+</dgm:dataModel>
+</file>
+
+<file path=ppt/diagrams/data9.xml><?xml version="1.0" encoding="utf-8"?>
+<dgm:dataModel xmlns:dgm="http://schemas.openxmlformats.org/drawingml/2006/diagram" xmlns:a="http://schemas.openxmlformats.org/drawingml/2006/main" xmlns:r="http://schemas.openxmlformats.org/officeDocument/2006/relationships">
+  <dgm:ptLst>
+    <dgm:pt modelId="{doc}" type="doc">
+      <dgm:prSet loTypeId="test/org"/>
+    </dgm:pt>
+    <dgm:pt modelId="{n1}">
+      <dgm:prSet/>
+      <dgm:spPr/>
+      <dgm:t>
+        <a:bodyPr/>
+        <a:lstStyle/>
+        <a:p>
+          <a:r>
+            <a:rPr lang="en-US"/>
+            <a:t>Head</a:t>
+          </a:r>
+        </a:p>
+      </dgm:t>
+    </dgm:pt>
+    <dgm:pt modelId="{p1}" type="parTrans" cxnId="{c1}"/>
+    <dgm:pt modelId="{s1}" type="sibTrans" cxnId="{c1}"/>
+    <dgm:pt modelId="{n2}">
+      <dgm:prSet/>
+      <dgm:spPr/>
+      <dgm:t>
+        <a:bodyPr/>
+        <a:lstStyle/>
+        <a:p>
+          <a:r>
+            <a:rPr lang="en-US"/>
+            <a:t>Init</a:t>
+          </a:r>
+        </a:p>
+      </dgm:t>
+    </dgm:pt>
+    <dgm:pt modelId="{p2}" type="parTrans" cxnId="{c2}"/>
+    <dgm:pt modelId="{s2}" type="sibTrans" cxnId="{c2}"/>
+    <dgm:pt modelId="{n3}">
+      <dgm:prSet/>
+      <dgm:spPr/>
+      <dgm:t>
+        <a:bodyPr/>
+        <a:lstStyle/>
+        <a:p>
+          <a:r>
+            <a:rPr lang="en-US"/>
+            <a:t>i1</a:t>
+          </a:r>
+        </a:p>
+      </dgm:t>
+    </dgm:pt>
+    <dgm:pt modelId="{p3}" type="parTrans" cxnId="{c3}"/>
+    <dgm:pt modelId="{s3}" type="sibTrans" cxnId="{c3}"/>
+    <dgm:pt modelId="{n4}">
+      <dgm:prSet/>
+      <dgm:spPr/>
+      <dgm:t>
+        <a:bodyPr/>
+        <a:lstStyle/>
+        <a:p>
+          <a:r>
+            <a:rPr lang="en-US"/>
+            <a:t>i2</a:t>
+          </a:r>
+        </a:p>
+      </dgm:t>
+    </dgm:pt>
+    <dgm:pt modelId="{p4}" type="parTrans" cxnId="{c4}"/>
+    <dgm:pt modelId="{s4}" type="sibTrans" cxnId="{c4}"/>
+    <dgm:pt modelId="{n5}">
+      <dgm:prSet/>
+      <dgm:spPr/>
+      <dgm:t>
+        <a:bodyPr/>
+        <a:lstStyle/>
+        <a:p>
+          <a:r>
+            <a:rPr lang="en-US"/>
+            <a:t>i3</a:t>
+          </a:r>
+        </a:p>
+      </dgm:t>
+    </dgm:pt>
+    <dgm:pt modelId="{p5}" type="parTrans" cxnId="{c5}"/>
+    <dgm:pt modelId="{s5}" type="sibTrans" cxnId="{c5}"/>
+    <dgm:pt modelId="{n6}">
+      <dgm:prSet/>
+      <dgm:spPr/>
+      <dgm:t>
+        <a:bodyPr/>
+        <a:lstStyle/>
+        <a:p>
+          <a:r>
+            <a:rPr lang="en-US"/>
+            <a:t>Both</a:t>
+          </a:r>
+        </a:p>
+      </dgm:t>
+    </dgm:pt>
+    <dgm:pt modelId="{p6}" type="parTrans" cxnId="{c6}"/>
+    <dgm:pt modelId="{s6}" type="sibTrans" cxnId="{c6}"/>
+    <dgm:pt modelId="{r6}" type="pres">
+      <dgm:prSet presAssocID="{n6}" presName="root">
+        <dgm:presLayoutVars>
+          <dgm:hierBranch val="hang"/>
+        </dgm:presLayoutVars>
+      </dgm:prSet>
+    </dgm:pt>
+    <dgm:pt modelId="{n7}">
+      <dgm:prSet/>
+      <dgm:spPr/>
+      <dgm:t>
+        <a:bodyPr/>
+        <a:lstStyle/>
+        <a:p>
+          <a:r>
+            <a:rPr lang="en-US"/>
+            <a:t>b1</a:t>
+          </a:r>
+        </a:p>
+      </dgm:t>
+    </dgm:pt>
+    <dgm:pt modelId="{p7}" type="parTrans" cxnId="{c7}"/>
+    <dgm:pt modelId="{s7}" type="sibTrans" cxnId="{c7}"/>
+    <dgm:pt modelId="{n8}">
+      <dgm:prSet/>
+      <dgm:spPr/>
+      <dgm:t>
+        <a:bodyPr/>
+        <a:lstStyle/>
+        <a:p>
+          <a:r>
+            <a:rPr lang="en-US"/>
+            <a:t>b2</a:t>
+          </a:r>
+        </a:p>
+      </dgm:t>
+    </dgm:pt>
+    <dgm:pt modelId="{p8}" type="parTrans" cxnId="{c8}"/>
+    <dgm:pt modelId="{s8}" type="sibTrans" cxnId="{c8}"/>
+    <dgm:pt modelId="{n9}">
+      <dgm:prSet/>
+      <dgm:spPr/>
+      <dgm:t>
+        <a:bodyPr/>
+        <a:lstStyle/>
+        <a:p>
+          <a:r>
+            <a:rPr lang="en-US"/>
+            <a:t>b3</a:t>
+          </a:r>
+        </a:p>
+      </dgm:t>
+    </dgm:pt>
+    <dgm:pt modelId="{p9}" type="parTrans" cxnId="{c9}"/>
+    <dgm:pt modelId="{s9}" type="sibTrans" cxnId="{c9}"/>
+    <dgm:pt modelId="{n10}">
+      <dgm:prSet/>
+      <dgm:spPr/>
+      <dgm:t>
+        <a:bodyPr/>
+        <a:lstStyle/>
+        <a:p>
+          <a:r>
+            <a:rPr lang="en-US"/>
+            <a:t>b4</a:t>
+          </a:r>
+        </a:p>
+      </dgm:t>
+    </dgm:pt>
+    <dgm:pt modelId="{p10}" type="parTrans" cxnId="{c10}"/>
+    <dgm:pt modelId="{s10}" type="sibTrans" cxnId="{c10}"/>
+    <dgm:pt modelId="{n11}">
+      <dgm:prSet/>
+      <dgm:spPr/>
+      <dgm:t>
+        <a:bodyPr/>
+        <a:lstStyle/>
+        <a:p>
+          <a:r>
+            <a:rPr lang="en-US"/>
+            <a:t>Right</a:t>
+          </a:r>
+        </a:p>
+      </dgm:t>
+    </dgm:pt>
+    <dgm:pt modelId="{p11}" type="parTrans" cxnId="{c11}"/>
+    <dgm:pt modelId="{s11}" type="sibTrans" cxnId="{c11}"/>
+    <dgm:pt modelId="{r11}" type="pres">
+      <dgm:prSet presAssocID="{n11}" presName="root">
+        <dgm:presLayoutVars>
+          <dgm:hierBranch val="r"/>
+        </dgm:presLayoutVars>
+      </dgm:prSet>
+    </dgm:pt>
+    <dgm:pt modelId="{n12}">
+      <dgm:prSet/>
+      <dgm:spPr/>
+      <dgm:t>
+        <a:bodyPr/>
+        <a:lstStyle/>
+        <a:p>
+          <a:r>
+            <a:rPr lang="en-US"/>
+            <a:t>r1</a:t>
+          </a:r>
+        </a:p>
+      </dgm:t>
+    </dgm:pt>
+    <dgm:pt modelId="{p12}" type="parTrans" cxnId="{c12}"/>
+    <dgm:pt modelId="{s12}" type="sibTrans" cxnId="{c12}"/>
+    <dgm:pt modelId="{n13}">
+      <dgm:prSet/>
+      <dgm:spPr/>
+      <dgm:t>
+        <a:bodyPr/>
+        <a:lstStyle/>
+        <a:p>
+          <a:r>
+            <a:rPr lang="en-US"/>
+            <a:t>r2</a:t>
+          </a:r>
+        </a:p>
+      </dgm:t>
+    </dgm:pt>
+    <dgm:pt modelId="{p13}" type="parTrans" cxnId="{c13}"/>
+    <dgm:pt modelId="{s13}" type="sibTrans" cxnId="{c13}"/>
+  </dgm:ptLst>
+  <dgm:cxnLst>
+    <dgm:cxn modelId="{c1}" srcId="{doc}" destId="{n1}" srcOrd="0" destOrd="0" parTransId="{p1}" sibTransId="{s1}"/>
+    <dgm:cxn modelId="{c2}" srcId="{n1}" destId="{n2}" srcOrd="0" destOrd="0" parTransId="{p2}" sibTransId="{s2}"/>
+    <dgm:cxn modelId="{c3}" srcId="{n2}" destId="{n3}" srcOrd="0" destOrd="0" parTransId="{p3}" sibTransId="{s3}"/>
+    <dgm:cxn modelId="{c4}" srcId="{n2}" destId="{n4}" srcOrd="1" destOrd="0" parTransId="{p4}" sibTransId="{s4}"/>
+    <dgm:cxn modelId="{c5}" srcId="{n2}" destId="{n5}" srcOrd="2" destOrd="0" parTransId="{p5}" sibTransId="{s5}"/>
+    <dgm:cxn modelId="{c6}" srcId="{n1}" destId="{n6}" srcOrd="1" destOrd="0" parTransId="{p6}" sibTransId="{s6}"/>
+    <dgm:cxn modelId="{c7}" srcId="{n6}" destId="{n7}" srcOrd="0" destOrd="0" parTransId="{p7}" sibTransId="{s7}"/>
+    <dgm:cxn modelId="{c8}" srcId="{n6}" destId="{n8}" srcOrd="1" destOrd="0" parTransId="{p8}" sibTransId="{s8}"/>
+    <dgm:cxn modelId="{c9}" srcId="{n6}" destId="{n9}" srcOrd="2" destOrd="0" parTransId="{p9}" sibTransId="{s9}"/>
+    <dgm:cxn modelId="{c10}" srcId="{n6}" destId="{n10}" srcOrd="3" destOrd="0" parTransId="{p10}" sibTransId="{s10}"/>
+    <dgm:cxn modelId="{c11}" srcId="{n1}" destId="{n11}" srcOrd="2" destOrd="0" parTransId="{p11}" sibTransId="{s11}"/>
+    <dgm:cxn modelId="{c12}" srcId="{n11}" destId="{n12}" srcOrd="0" destOrd="0" parTransId="{p12}" sibTransId="{s12}"/>
+    <dgm:cxn modelId="{c13}" srcId="{n11}" destId="{n13}" srcOrd="1" destOrd="0" parTransId="{p13}" sibTransId="{s13}"/>
   </dgm:cxnLst>
   <dgm:bg/>
   <dgm:whole/>
@@ -977,6 +1345,59 @@
           <dgm:presOf/>
         </dgm:layoutNode>
       </dgm:forEach>
+    </dgm:forEach>
+  </dgm:layoutNode>
+</dgm:layoutDef>
+</file>
+
+<file path=ppt/diagrams/layout10.xml><?xml version="1.0" encoding="utf-8"?>
+<dgm:layoutDef xmlns:dgm="http://schemas.openxmlformats.org/drawingml/2006/diagram" xmlns:a="http://schemas.openxmlformats.org/drawingml/2006/main" xmlns:r="http://schemas.openxmlformats.org/officeDocument/2006/relationships" uniqueId="test/pictures">
+  <dgm:layoutNode name="diagram">
+    <dgm:alg type="lin">
+      <dgm:param type="linDir" val="fromT"/>
+    </dgm:alg>
+    <dgm:shape/>
+    <dgm:presOf/>
+    <dgm:constrLst>
+      <dgm:constr type="w" for="ch" forName="item" refType="w"/>
+      <dgm:constr type="h" for="ch" forName="item" refType="h" fact="0.4"/>
+      <dgm:constr type="sp" refType="h" refFor="ch" refForName="item" fact="0.2"/>
+      <dgm:constr type="primFontSz" for="des" forName="txt" op="equ" val="65"/>
+    </dgm:constrLst>
+    <dgm:forEach name="items" axis="ch" ptType="node">
+      <dgm:layoutNode name="item">
+        <dgm:alg type="composite"/>
+        <dgm:shape/>
+        <dgm:presOf/>
+        <dgm:constrLst>
+          <dgm:constr type="l" for="ch" forName="pic"/>
+          <dgm:constr type="t" for="ch" forName="pic"/>
+          <dgm:constr type="h" for="ch" forName="pic" refType="h"/>
+          <dgm:constr type="w" for="ch" forName="pic" refType="h" refFor="ch" refForName="pic"/>
+          <dgm:constr type="l" for="ch" forName="txt" refType="r" refFor="ch" refForName="pic"/>
+          <dgm:constr type="ctrY" for="ch" forName="txt" refType="ctrY" refFor="ch" refForName="pic"/>
+          <dgm:constr type="h" for="ch" forName="txt" refType="h" fact="0.5"/>
+        </dgm:constrLst>
+        <dgm:layoutNode name="pic" styleLbl="node1">
+          <dgm:alg type="sp"/>
+          <dgm:shape type="ellipse" blipPhldr="1"/>
+          <dgm:presOf/>
+        </dgm:layoutNode>
+        <dgm:layoutNode name="txt">
+          <dgm:alg type="tx"/>
+          <dgm:shape type="rect"/>
+          <dgm:presOf axis="self"/>
+          <dgm:constrLst>
+            <dgm:constr type="tMarg" refType="primFontSz" fact="0.3"/>
+            <dgm:constr type="bMarg" refType="primFontSz" fact="0.3"/>
+            <dgm:constr type="lMarg" refType="primFontSz" fact="0.3"/>
+            <dgm:constr type="rMarg" refType="primFontSz" fact="0.3"/>
+          </dgm:constrLst>
+          <dgm:ruleLst>
+            <dgm:rule type="primFontSz" val="5" fact="NaN" max="NaN"/>
+          </dgm:ruleLst>
+        </dgm:layoutNode>
+      </dgm:layoutNode>
     </dgm:forEach>
   </dgm:layoutNode>
 </dgm:layoutDef>
@@ -1318,6 +1739,193 @@
 </dgm:layoutDef>
 </file>
 
+<file path=ppt/diagrams/layout9.xml><?xml version="1.0" encoding="utf-8"?>
+<dgm:layoutDef xmlns:dgm="http://schemas.openxmlformats.org/drawingml/2006/diagram" xmlns:a="http://schemas.openxmlformats.org/drawingml/2006/main" xmlns:r="http://schemas.openxmlformats.org/officeDocument/2006/relationships" uniqueId="test/org">
+  <dgm:layoutNode name="diagram">
+    <dgm:alg type="hierChild"/>
+    <dgm:shape/>
+    <dgm:presOf/>
+    <dgm:constrLst>
+      <dgm:constr type="w" for="des" forName="comp" refType="w"/>
+      <dgm:constr type="h" for="des" forName="comp" refType="w" refFor="des" refForName="comp" fact="0.5"/>
+      <dgm:constr type="primFontSz" for="des" ptType="node" op="equ" val="65"/>
+      <dgm:constr type="sp" for="des" forName="root" refType="w" refFor="des" refForName="comp" fact="0.2"/>
+      <dgm:constr type="sibSp" refType="w" refFor="des" refForName="comp" fact="0.2"/>
+      <dgm:constr type="sibSp" for="des" forName="kids" refType="sibSp"/>
+      <dgm:constr type="secSibSp" refType="w" refFor="des" refForName="comp" fact="0.2"/>
+      <dgm:constr type="secSibSp" for="des" forName="kids" refType="secSibSp"/>
+    </dgm:constrLst>
+    <dgm:forEach name="each" axis="ch" ptType="node">
+      <dgm:forEach name="lines" axis="precedSib" ptType="parTrans" st="-1" cnt="1">
+        <dgm:layoutNode name="line">
+          <dgm:choose name="b">
+            <dgm:if name="bstd" func="var" arg="hierBranch" op="equ" val="std">
+              <dgm:alg type="conn">
+                <dgm:param type="connRout" val="bend"/>
+                <dgm:param type="dim" val="1D"/>
+                <dgm:param type="endSty" val="noArr"/>
+                <dgm:param type="begPts" val="bCtr"/>
+                <dgm:param type="endPts" val="tCtr"/>
+              </dgm:alg>
+            </dgm:if>
+            <dgm:if name="binit" func="var" arg="hierBranch" op="equ" val="init">
+              <dgm:choose name="d">
+                <dgm:if name="d1" axis="self" func="depth" op="lte" val="2">
+                  <dgm:alg type="conn">
+                    <dgm:param type="connRout" val="bend"/>
+                    <dgm:param type="dim" val="1D"/>
+                    <dgm:param type="endSty" val="noArr"/>
+                    <dgm:param type="begPts" val="bCtr"/>
+                    <dgm:param type="endPts" val="tCtr"/>
+                  </dgm:alg>
+                </dgm:if>
+                <dgm:else name="d2">
+                  <dgm:alg type="conn">
+                    <dgm:param type="connRout" val="bend"/>
+                    <dgm:param type="dim" val="1D"/>
+                    <dgm:param type="endSty" val="noArr"/>
+                    <dgm:param type="begPts" val="bCtr"/>
+                    <dgm:param type="endPts" val="midL midR"/>
+                    <dgm:param type="srcNode" val="conn"/>
+                  </dgm:alg>
+                </dgm:else>
+              </dgm:choose>
+            </dgm:if>
+            <dgm:if name="br" func="var" arg="hierBranch" op="equ" val="r">
+              <dgm:alg type="conn">
+                <dgm:param type="connRout" val="bend"/>
+                <dgm:param type="dim" val="1D"/>
+                <dgm:param type="endSty" val="noArr"/>
+                <dgm:param type="begPts" val="bCtr"/>
+                <dgm:param type="endPts" val="midL midR"/>
+                <dgm:param type="srcNode" val="conn"/>
+              </dgm:alg>
+            </dgm:if>
+            <dgm:else name="bx">
+              <dgm:alg type="conn">
+                <dgm:param type="connRout" val="bend"/>
+                <dgm:param type="dim" val="1D"/>
+                <dgm:param type="endSty" val="noArr"/>
+                <dgm:param type="begPts" val="bCtr"/>
+                <dgm:param type="endPts" val="midL midR"/>
+              </dgm:alg>
+            </dgm:else>
+          </dgm:choose>
+          <dgm:shape type="conn" zOrderOff="-99999"/>
+          <dgm:presOf axis="self"/>
+        </dgm:layoutNode>
+      </dgm:forEach>
+      <dgm:layoutNode name="root">
+        <dgm:varLst>
+          <dgm:hierBranch val="init"/>
+        </dgm:varLst>
+        <dgm:choose name="b">
+          <dgm:if name="br" func="var" arg="hierBranch" op="equ" val="r">
+            <dgm:alg type="hierRoot">
+              <dgm:param type="hierAlign" val="tL"/>
+            </dgm:alg>
+            <dgm:constrLst>
+              <dgm:constr type="alignOff" val="0.25"/>
+            </dgm:constrLst>
+          </dgm:if>
+          <dgm:else name="bx">
+            <dgm:alg type="hierRoot"/>
+          </dgm:else>
+        </dgm:choose>
+        <dgm:shape/>
+        <dgm:presOf/>
+        <dgm:layoutNode name="comp">
+          <dgm:alg type="composite"/>
+          <dgm:shape/>
+          <dgm:presOf axis="self" ptType="node" cnt="1"/>
+          <dgm:choose name="b">
+            <dgm:if name="binit" func="var" arg="hierBranch" op="equ" val="init">
+              <dgm:constrLst>
+                <dgm:constr type="l" for="ch" forName="box"/>
+                <dgm:constr type="t" for="ch" forName="box"/>
+                <dgm:constr type="w" for="ch" forName="box" refType="w"/>
+                <dgm:constr type="h" for="ch" forName="box" refType="h"/>
+                <dgm:constr type="l" for="ch" forName="conn"/>
+                <dgm:constr type="t" for="ch" forName="conn"/>
+                <dgm:constr type="w" for="ch" forName="conn" refType="w" fact="0.2"/>
+                <dgm:constr type="h" for="ch" forName="conn" refType="h"/>
+              </dgm:constrLst>
+            </dgm:if>
+            <dgm:if name="br" func="var" arg="hierBranch" op="equ" val="r">
+              <dgm:constrLst>
+                <dgm:constr type="l" for="ch" forName="box"/>
+                <dgm:constr type="t" for="ch" forName="box"/>
+                <dgm:constr type="w" for="ch" forName="box" refType="w"/>
+                <dgm:constr type="h" for="ch" forName="box" refType="h"/>
+                <dgm:constr type="l" for="ch" forName="conn"/>
+                <dgm:constr type="t" for="ch" forName="conn"/>
+                <dgm:constr type="w" for="ch" forName="conn" refType="w" fact="0.2"/>
+                <dgm:constr type="h" for="ch" forName="conn" refType="h"/>
+              </dgm:constrLst>
+            </dgm:if>
+            <dgm:else name="bx">
+              <dgm:constrLst>
+                <dgm:constr type="l" for="ch" forName="box"/>
+                <dgm:constr type="t" for="ch" forName="box"/>
+                <dgm:constr type="w" for="ch" forName="box" refType="w"/>
+                <dgm:constr type="h" for="ch" forName="box" refType="h"/>
+                <dgm:constr type="r" for="ch" forName="conn" refType="w"/>
+                <dgm:constr type="t" for="ch" forName="conn"/>
+                <dgm:constr type="w" for="ch" forName="conn" refType="w" fact="0.2"/>
+                <dgm:constr type="h" for="ch" forName="conn" refType="h"/>
+              </dgm:constrLst>
+            </dgm:else>
+          </dgm:choose>
+          <dgm:layoutNode name="box">
+            <dgm:alg type="tx"/>
+            <dgm:shape type="rect"/>
+            <dgm:presOf axis="self"/>
+            <dgm:constrLst>
+              <dgm:constr type="tMarg" refType="primFontSz" fact="0.3"/>
+              <dgm:constr type="bMarg" refType="primFontSz" fact="0.3"/>
+              <dgm:constr type="lMarg" refType="primFontSz" fact="0.3"/>
+              <dgm:constr type="rMarg" refType="primFontSz" fact="0.3"/>
+            </dgm:constrLst>
+            <dgm:ruleLst>
+              <dgm:rule type="primFontSz" val="5" fact="NaN" max="NaN"/>
+            </dgm:ruleLst>
+          </dgm:layoutNode>
+          <dgm:layoutNode name="conn">
+            <dgm:alg type="sp"/>
+            <dgm:shape type="rect" hideGeom="1"/>
+            <dgm:presOf/>
+          </dgm:layoutNode>
+        </dgm:layoutNode>
+        <dgm:layoutNode name="kids">
+          <dgm:choose name="b">
+            <dgm:if name="bhang" func="var" arg="hierBranch" op="equ" val="hang">
+              <dgm:alg type="hierChild">
+                <dgm:param type="chAlign" val="l"/>
+                <dgm:param type="linDir" val="fromL"/>
+                <dgm:param type="secChAlign" val="t"/>
+                <dgm:param type="secLinDir" val="fromT"/>
+              </dgm:alg>
+            </dgm:if>
+            <dgm:if name="br" func="var" arg="hierBranch" op="equ" val="r">
+              <dgm:alg type="hierChild">
+                <dgm:param type="chAlign" val="l"/>
+                <dgm:param type="linDir" val="fromT"/>
+              </dgm:alg>
+            </dgm:if>
+            <dgm:else name="bx">
+              <dgm:alg type="hierChild"/>
+            </dgm:else>
+          </dgm:choose>
+          <dgm:shape/>
+          <dgm:presOf/>
+          <dgm:forEach name="more" ref="each"/>
+        </dgm:layoutNode>
+      </dgm:layoutNode>
+    </dgm:forEach>
+  </dgm:layoutNode>
+</dgm:layoutDef>
+</file>
+
 <file path=ppt/diagrams/quickStyle1.xml><?xml version="1.0" encoding="utf-8"?>
 <dgm:styleDef xmlns:dgm="http://schemas.openxmlformats.org/drawingml/2006/diagram" xmlns:a="http://schemas.openxmlformats.org/drawingml/2006/main" xmlns:r="http://schemas.openxmlformats.org/officeDocument/2006/relationships" uniqueId="test/style">
   <dgm:styleLbl name="node1">
@@ -1367,6 +1975,55 @@
 </dgm:styleDef>
 </file>
 
+<file path=ppt/diagrams/quickStyle10.xml><?xml version="1.0" encoding="utf-8"?>
+<dgm:styleDef xmlns:dgm="http://schemas.openxmlformats.org/drawingml/2006/diagram" xmlns:a="http://schemas.openxmlformats.org/drawingml/2006/main" xmlns:r="http://schemas.openxmlformats.org/officeDocument/2006/relationships" uniqueId="test/style">
+  <dgm:styleLbl name="node1">
+    <dgm:style>
+      <a:lnRef idx="2">
+        <a:scrgbClr r="0" g="0" b="0"/>
+      </a:lnRef>
+      <a:fillRef idx="1">
+        <a:scrgbClr r="0" g="0" b="0"/>
+      </a:fillRef>
+      <a:effectRef idx="0">
+        <a:scrgbClr r="0" g="0" b="0"/>
+      </a:effectRef>
+      <a:fontRef idx="minor">
+        <a:schemeClr val="lt1"/>
+      </a:fontRef>
+    </dgm:style>
+  </dgm:styleLbl>
+  <dgm:styleLbl name="sibTrans2D1">
+    <dgm:style>
+      <a:lnRef idx="0">
+        <a:scrgbClr r="0" g="0" b="0"/>
+      </a:lnRef>
+      <a:fillRef idx="1">
+        <a:scrgbClr r="0" g="0" b="0"/>
+      </a:fillRef>
+      <a:effectRef idx="0">
+        <a:scrgbClr r="0" g="0" b="0"/>
+      </a:effectRef>
+      <a:fontRef idx="minor"/>
+    </dgm:style>
+  </dgm:styleLbl>
+  <dgm:styleLbl name="parChTrans1D1">
+    <dgm:style>
+      <a:lnRef idx="2">
+        <a:scrgbClr r="0" g="0" b="0"/>
+      </a:lnRef>
+      <a:fillRef idx="0">
+        <a:scrgbClr r="0" g="0" b="0"/>
+      </a:fillRef>
+      <a:effectRef idx="0">
+        <a:scrgbClr r="0" g="0" b="0"/>
+      </a:effectRef>
+      <a:fontRef idx="minor"/>
+    </dgm:style>
+  </dgm:styleLbl>
+</dgm:styleDef>
+</file>
+
 <file path=ppt/diagrams/quickStyle2.xml><?xml version="1.0" encoding="utf-8"?>
 <dgm:styleDef xmlns:dgm="http://schemas.openxmlformats.org/drawingml/2006/diagram" xmlns:a="http://schemas.openxmlformats.org/drawingml/2006/main" xmlns:r="http://schemas.openxmlformats.org/officeDocument/2006/relationships" uniqueId="test/style">
   <dgm:styleLbl name="node1">
@@ -1662,6 +2319,55 @@
 </file>
 
 <file path=ppt/diagrams/quickStyle8.xml><?xml version="1.0" encoding="utf-8"?>
+<dgm:styleDef xmlns:dgm="http://schemas.openxmlformats.org/drawingml/2006/diagram" xmlns:a="http://schemas.openxmlformats.org/drawingml/2006/main" xmlns:r="http://schemas.openxmlformats.org/officeDocument/2006/relationships" uniqueId="test/style">
+  <dgm:styleLbl name="node1">
+    <dgm:style>
+      <a:lnRef idx="2">
+        <a:scrgbClr r="0" g="0" b="0"/>
+      </a:lnRef>
+      <a:fillRef idx="1">
+        <a:scrgbClr r="0" g="0" b="0"/>
+      </a:fillRef>
+      <a:effectRef idx="0">
+        <a:scrgbClr r="0" g="0" b="0"/>
+      </a:effectRef>
+      <a:fontRef idx="minor">
+        <a:schemeClr val="lt1"/>
+      </a:fontRef>
+    </dgm:style>
+  </dgm:styleLbl>
+  <dgm:styleLbl name="sibTrans2D1">
+    <dgm:style>
+      <a:lnRef idx="0">
+        <a:scrgbClr r="0" g="0" b="0"/>
+      </a:lnRef>
+      <a:fillRef idx="1">
+        <a:scrgbClr r="0" g="0" b="0"/>
+      </a:fillRef>
+      <a:effectRef idx="0">
+        <a:scrgbClr r="0" g="0" b="0"/>
+      </a:effectRef>
+      <a:fontRef idx="minor"/>
+    </dgm:style>
+  </dgm:styleLbl>
+  <dgm:styleLbl name="parChTrans1D1">
+    <dgm:style>
+      <a:lnRef idx="2">
+        <a:scrgbClr r="0" g="0" b="0"/>
+      </a:lnRef>
+      <a:fillRef idx="0">
+        <a:scrgbClr r="0" g="0" b="0"/>
+      </a:fillRef>
+      <a:effectRef idx="0">
+        <a:scrgbClr r="0" g="0" b="0"/>
+      </a:effectRef>
+      <a:fontRef idx="minor"/>
+    </dgm:style>
+  </dgm:styleLbl>
+</dgm:styleDef>
+</file>
+
+<file path=ppt/diagrams/quickStyle9.xml><?xml version="1.0" encoding="utf-8"?>
 <dgm:styleDef xmlns:dgm="http://schemas.openxmlformats.org/drawingml/2006/diagram" xmlns:a="http://schemas.openxmlformats.org/drawingml/2006/main" xmlns:r="http://schemas.openxmlformats.org/officeDocument/2006/relationships" uniqueId="test/style">
   <dgm:styleLbl name="node1">
     <dgm:style>
@@ -1772,6 +2478,37 @@
 </p:sld>
 </file>
 
+<file path=ppt/slides/slide10.xml><?xml version="1.0" encoding="utf-8"?>
+<p:sld xmlns:a="http://schemas.openxmlformats.org/drawingml/2006/main" xmlns:r="http://schemas.openxmlformats.org/officeDocument/2006/relationships" xmlns:p="http://schemas.openxmlformats.org/presentationml/2006/main">
+  <p:cSld>
+    <p:spTree>
+      <p:nvGrpSpPr>
+        <p:cNvPr id="1" name=""/>
+        <p:cNvGrpSpPr/>
+        <p:nvPr/>
+      </p:nvGrpSpPr>
+      <p:grpSpPr/>
+      <p:graphicFrame>
+        <p:nvGraphicFramePr>
+          <p:cNvPr id="2" name="Diagram 10"/>
+          <p:cNvGraphicFramePr/>
+          <p:nvPr/>
+        </p:nvGraphicFramePr>
+        <p:xfrm>
+          <a:off x="1524000" y="571500"/>
+          <a:ext cx="6096000" cy="4000500"/>
+        </p:xfrm>
+        <a:graphic>
+          <a:graphicData uri="http://schemas.openxmlformats.org/drawingml/2006/diagram">
+            <dgm:relIds xmlns:dgm="http://schemas.openxmlformats.org/drawingml/2006/diagram" r:dm="rId2" r:lo="rId3" r:qs="rId4" r:cs="rId5"/>
+          </a:graphicData>
+        </a:graphic>
+      </p:graphicFrame>
+    </p:spTree>
+  </p:cSld>
+</p:sld>
+</file>
+
 <file path=ppt/slides/slide2.xml><?xml version="1.0" encoding="utf-8"?>
 <p:sld xmlns:a="http://schemas.openxmlformats.org/drawingml/2006/main" xmlns:r="http://schemas.openxmlformats.org/officeDocument/2006/relationships" xmlns:p="http://schemas.openxmlformats.org/presentationml/2006/main">
   <p:cSld>
@@ -1971,6 +2708,37 @@
       <p:graphicFrame>
         <p:nvGraphicFramePr>
           <p:cNvPr id="2" name="Diagram 8"/>
+          <p:cNvGraphicFramePr/>
+          <p:nvPr/>
+        </p:nvGraphicFramePr>
+        <p:xfrm>
+          <a:off x="1524000" y="571500"/>
+          <a:ext cx="6096000" cy="4000500"/>
+        </p:xfrm>
+        <a:graphic>
+          <a:graphicData uri="http://schemas.openxmlformats.org/drawingml/2006/diagram">
+            <dgm:relIds xmlns:dgm="http://schemas.openxmlformats.org/drawingml/2006/diagram" r:dm="rId2" r:lo="rId3" r:qs="rId4" r:cs="rId5"/>
+          </a:graphicData>
+        </a:graphic>
+      </p:graphicFrame>
+    </p:spTree>
+  </p:cSld>
+</p:sld>
+</file>
+
+<file path=ppt/slides/slide9.xml><?xml version="1.0" encoding="utf-8"?>
+<p:sld xmlns:a="http://schemas.openxmlformats.org/drawingml/2006/main" xmlns:r="http://schemas.openxmlformats.org/officeDocument/2006/relationships" xmlns:p="http://schemas.openxmlformats.org/presentationml/2006/main">
+  <p:cSld>
+    <p:spTree>
+      <p:nvGrpSpPr>
+        <p:cNvPr id="1" name=""/>
+        <p:cNvGrpSpPr/>
+        <p:nvPr/>
+      </p:nvGrpSpPr>
+      <p:grpSpPr/>
+      <p:graphicFrame>
+        <p:nvGraphicFramePr>
+          <p:cNvPr id="2" name="Diagram 9"/>
           <p:cNvGraphicFramePr/>
           <p:nvPr/>
         </p:nvGraphicFramePr>

--- a/tests/data/smartart.pptx
+++ b/tests/data/smartart.pptx
@@ -15,6 +15,9 @@
     <p:sldId id="263" r:id="rId9"/>
     <p:sldId id="264" r:id="rId10"/>
     <p:sldId id="265" r:id="rId11"/>
+    <p:sldId id="266" r:id="rId12"/>
+    <p:sldId id="267" r:id="rId13"/>
+    <p:sldId id="268" r:id="rId14"/>
   </p:sldIdLst>
   <p:sldSz cx="9144000" cy="5143500"/>
 </p:presentation>
@@ -50,6 +53,93 @@
 </file>
 
 <file path=ppt/diagrams/colors10.xml><?xml version="1.0" encoding="utf-8"?>
+<dgm:colorsDef xmlns:dgm="http://schemas.openxmlformats.org/drawingml/2006/diagram" xmlns:a="http://schemas.openxmlformats.org/drawingml/2006/main" xmlns:r="http://schemas.openxmlformats.org/officeDocument/2006/relationships" uniqueId="test/colors">
+  <dgm:styleLbl name="node1">
+    <dgm:fillClrLst meth="repeat">
+      <a:schemeClr val="accent1"/>
+    </dgm:fillClrLst>
+    <dgm:linClrLst meth="repeat">
+      <a:schemeClr val="lt1"/>
+    </dgm:linClrLst>
+    <dgm:txFillClrLst meth="repeat">
+      <a:schemeClr val="lt1"/>
+    </dgm:txFillClrLst>
+  </dgm:styleLbl>
+  <dgm:styleLbl name="sibTrans2D1">
+    <dgm:fillClrLst meth="repeat">
+      <a:schemeClr val="accent2"/>
+    </dgm:fillClrLst>
+    <dgm:linClrLst meth="repeat">
+      <a:schemeClr val="accent2"/>
+    </dgm:linClrLst>
+  </dgm:styleLbl>
+  <dgm:styleLbl name="parChTrans1D1">
+    <dgm:linClrLst meth="repeat">
+      <a:schemeClr val="accent6"/>
+    </dgm:linClrLst>
+  </dgm:styleLbl>
+</dgm:colorsDef>
+</file>
+
+<file path=ppt/diagrams/colors11.xml><?xml version="1.0" encoding="utf-8"?>
+<dgm:colorsDef xmlns:dgm="http://schemas.openxmlformats.org/drawingml/2006/diagram" xmlns:a="http://schemas.openxmlformats.org/drawingml/2006/main" xmlns:r="http://schemas.openxmlformats.org/officeDocument/2006/relationships" uniqueId="test/colors">
+  <dgm:styleLbl name="node1">
+    <dgm:fillClrLst meth="repeat">
+      <a:schemeClr val="accent1"/>
+    </dgm:fillClrLst>
+    <dgm:linClrLst meth="repeat">
+      <a:schemeClr val="lt1"/>
+    </dgm:linClrLst>
+    <dgm:txFillClrLst meth="repeat">
+      <a:schemeClr val="lt1"/>
+    </dgm:txFillClrLst>
+  </dgm:styleLbl>
+  <dgm:styleLbl name="sibTrans2D1">
+    <dgm:fillClrLst meth="repeat">
+      <a:schemeClr val="accent2"/>
+    </dgm:fillClrLst>
+    <dgm:linClrLst meth="repeat">
+      <a:schemeClr val="accent2"/>
+    </dgm:linClrLst>
+  </dgm:styleLbl>
+  <dgm:styleLbl name="parChTrans1D1">
+    <dgm:linClrLst meth="repeat">
+      <a:schemeClr val="accent6"/>
+    </dgm:linClrLst>
+  </dgm:styleLbl>
+</dgm:colorsDef>
+</file>
+
+<file path=ppt/diagrams/colors12.xml><?xml version="1.0" encoding="utf-8"?>
+<dgm:colorsDef xmlns:dgm="http://schemas.openxmlformats.org/drawingml/2006/diagram" xmlns:a="http://schemas.openxmlformats.org/drawingml/2006/main" xmlns:r="http://schemas.openxmlformats.org/officeDocument/2006/relationships" uniqueId="test/colors">
+  <dgm:styleLbl name="node1">
+    <dgm:fillClrLst meth="repeat">
+      <a:schemeClr val="accent1"/>
+    </dgm:fillClrLst>
+    <dgm:linClrLst meth="repeat">
+      <a:schemeClr val="lt1"/>
+    </dgm:linClrLst>
+    <dgm:txFillClrLst meth="repeat">
+      <a:schemeClr val="lt1"/>
+    </dgm:txFillClrLst>
+  </dgm:styleLbl>
+  <dgm:styleLbl name="sibTrans2D1">
+    <dgm:fillClrLst meth="repeat">
+      <a:schemeClr val="accent2"/>
+    </dgm:fillClrLst>
+    <dgm:linClrLst meth="repeat">
+      <a:schemeClr val="accent2"/>
+    </dgm:linClrLst>
+  </dgm:styleLbl>
+  <dgm:styleLbl name="parChTrans1D1">
+    <dgm:linClrLst meth="repeat">
+      <a:schemeClr val="accent6"/>
+    </dgm:linClrLst>
+  </dgm:styleLbl>
+</dgm:colorsDef>
+</file>
+
+<file path=ppt/diagrams/colors13.xml><?xml version="1.0" encoding="utf-8"?>
 <dgm:colorsDef xmlns:dgm="http://schemas.openxmlformats.org/drawingml/2006/diagram" xmlns:a="http://schemas.openxmlformats.org/drawingml/2006/main" xmlns:r="http://schemas.openxmlformats.org/officeDocument/2006/relationships" uniqueId="test/colors">
   <dgm:styleLbl name="node1">
     <dgm:fillClrLst meth="repeat">
@@ -452,6 +542,167 @@
           <a:r>
             <a:rPr lang="en-US"/>
             <a:t>Placeholder</a:t>
+          </a:r>
+        </a:p>
+      </dgm:t>
+    </dgm:pt>
+    <dgm:pt modelId="{p2}" type="parTrans" cxnId="{c2}"/>
+    <dgm:pt modelId="{s2}" type="sibTrans" cxnId="{c2}"/>
+  </dgm:ptLst>
+  <dgm:cxnLst>
+    <dgm:cxn modelId="{c1}" srcId="{doc}" destId="{n1}" srcOrd="0" destOrd="0" parTransId="{p1}" sibTransId="{s1}"/>
+    <dgm:cxn modelId="{c2}" srcId="{doc}" destId="{n2}" srcOrd="1" destOrd="0" parTransId="{p2}" sibTransId="{s2}"/>
+  </dgm:cxnLst>
+  <dgm:bg/>
+  <dgm:whole/>
+</dgm:dataModel>
+</file>
+
+<file path=ppt/diagrams/data11.xml><?xml version="1.0" encoding="utf-8"?>
+<dgm:dataModel xmlns:dgm="http://schemas.openxmlformats.org/drawingml/2006/diagram" xmlns:a="http://schemas.openxmlformats.org/drawingml/2006/main" xmlns:r="http://schemas.openxmlformats.org/officeDocument/2006/relationships">
+  <dgm:ptLst>
+    <dgm:pt modelId="{doc}" type="doc">
+      <dgm:prSet loTypeId="test/curves"/>
+    </dgm:pt>
+    <dgm:pt modelId="{n1}">
+      <dgm:prSet/>
+      <dgm:spPr/>
+      <dgm:t>
+        <a:bodyPr/>
+        <a:lstStyle/>
+        <a:p>
+          <a:r>
+            <a:rPr lang="en-US"/>
+            <a:t>Plan</a:t>
+          </a:r>
+        </a:p>
+      </dgm:t>
+    </dgm:pt>
+    <dgm:pt modelId="{p1}" type="parTrans" cxnId="{c1}"/>
+    <dgm:pt modelId="{s1}" type="sibTrans" cxnId="{c1}"/>
+    <dgm:pt modelId="{n2}">
+      <dgm:prSet/>
+      <dgm:spPr/>
+      <dgm:t>
+        <a:bodyPr/>
+        <a:lstStyle/>
+        <a:p>
+          <a:r>
+            <a:rPr lang="en-US"/>
+            <a:t>Build</a:t>
+          </a:r>
+        </a:p>
+      </dgm:t>
+    </dgm:pt>
+    <dgm:pt modelId="{p2}" type="parTrans" cxnId="{c2}"/>
+    <dgm:pt modelId="{s2}" type="sibTrans" cxnId="{c2}"/>
+    <dgm:pt modelId="{n3}">
+      <dgm:prSet/>
+      <dgm:spPr/>
+      <dgm:t>
+        <a:bodyPr/>
+        <a:lstStyle/>
+        <a:p>
+          <a:r>
+            <a:rPr lang="en-US"/>
+            <a:t>Ship</a:t>
+          </a:r>
+        </a:p>
+      </dgm:t>
+    </dgm:pt>
+    <dgm:pt modelId="{p3}" type="parTrans" cxnId="{c3}"/>
+    <dgm:pt modelId="{s3}" type="sibTrans" cxnId="{c3}"/>
+  </dgm:ptLst>
+  <dgm:cxnLst>
+    <dgm:cxn modelId="{c1}" srcId="{doc}" destId="{n1}" srcOrd="0" destOrd="0" parTransId="{p1}" sibTransId="{s1}"/>
+    <dgm:cxn modelId="{c2}" srcId="{doc}" destId="{n2}" srcOrd="1" destOrd="0" parTransId="{p2}" sibTransId="{s2}"/>
+    <dgm:cxn modelId="{c3}" srcId="{doc}" destId="{n3}" srcOrd="2" destOrd="0" parTransId="{p3}" sibTransId="{s3}"/>
+  </dgm:cxnLst>
+  <dgm:bg/>
+  <dgm:whole/>
+</dgm:dataModel>
+</file>
+
+<file path=ppt/diagrams/data12.xml><?xml version="1.0" encoding="utf-8"?>
+<dgm:dataModel xmlns:dgm="http://schemas.openxmlformats.org/drawingml/2006/diagram" xmlns:a="http://schemas.openxmlformats.org/drawingml/2006/main" xmlns:r="http://schemas.openxmlformats.org/officeDocument/2006/relationships">
+  <dgm:ptLst>
+    <dgm:pt modelId="{doc}" type="doc">
+      <dgm:prSet loTypeId="test/turned"/>
+    </dgm:pt>
+    <dgm:pt modelId="{n1}">
+      <dgm:prSet/>
+      <dgm:spPr/>
+      <dgm:t>
+        <a:bodyPr/>
+        <a:lstStyle/>
+        <a:p>
+          <a:r>
+            <a:rPr lang="en-US"/>
+            <a:t>Up</a:t>
+          </a:r>
+        </a:p>
+      </dgm:t>
+    </dgm:pt>
+    <dgm:pt modelId="{p1}" type="parTrans" cxnId="{c1}"/>
+    <dgm:pt modelId="{s1}" type="sibTrans" cxnId="{c1}"/>
+    <dgm:pt modelId="{n2}">
+      <dgm:prSet/>
+      <dgm:spPr/>
+      <dgm:t>
+        <a:bodyPr/>
+        <a:lstStyle/>
+        <a:p>
+          <a:r>
+            <a:rPr lang="en-US"/>
+            <a:t>Turned</a:t>
+          </a:r>
+        </a:p>
+      </dgm:t>
+    </dgm:pt>
+    <dgm:pt modelId="{p2}" type="parTrans" cxnId="{c2}"/>
+    <dgm:pt modelId="{s2}" type="sibTrans" cxnId="{c2}"/>
+  </dgm:ptLst>
+  <dgm:cxnLst>
+    <dgm:cxn modelId="{c1}" srcId="{doc}" destId="{n1}" srcOrd="0" destOrd="0" parTransId="{p1}" sibTransId="{s1}"/>
+    <dgm:cxn modelId="{c2}" srcId="{doc}" destId="{n2}" srcOrd="1" destOrd="0" parTransId="{p2}" sibTransId="{s2}"/>
+  </dgm:cxnLst>
+  <dgm:bg/>
+  <dgm:whole/>
+</dgm:dataModel>
+</file>
+
+<file path=ppt/diagrams/data13.xml><?xml version="1.0" encoding="utf-8"?>
+<dgm:dataModel xmlns:dgm="http://schemas.openxmlformats.org/drawingml/2006/diagram" xmlns:a="http://schemas.openxmlformats.org/drawingml/2006/main" xmlns:r="http://schemas.openxmlformats.org/officeDocument/2006/relationships">
+  <dgm:ptLst>
+    <dgm:pt modelId="{doc}" type="doc">
+      <dgm:prSet loTypeId="test/process"/>
+    </dgm:pt>
+    <dgm:pt modelId="{n1}">
+      <dgm:prSet/>
+      <dgm:spPr/>
+      <dgm:t>
+        <a:bodyPr/>
+        <a:lstStyle/>
+        <a:p>
+          <a:r>
+            <a:rPr lang="en-US"/>
+            <a:t>Depth</a:t>
+          </a:r>
+        </a:p>
+      </dgm:t>
+    </dgm:pt>
+    <dgm:pt modelId="{p1}" type="parTrans" cxnId="{c1}"/>
+    <dgm:pt modelId="{s1}" type="sibTrans" cxnId="{c1}"/>
+    <dgm:pt modelId="{n2}">
+      <dgm:prSet/>
+      <dgm:spPr/>
+      <dgm:t>
+        <a:bodyPr/>
+        <a:lstStyle/>
+        <a:p>
+          <a:r>
+            <a:rPr lang="en-US"/>
+            <a:t>Shadow</a:t>
           </a:r>
         </a:p>
       </dgm:t>
@@ -1398,6 +1649,151 @@
           </dgm:ruleLst>
         </dgm:layoutNode>
       </dgm:layoutNode>
+    </dgm:forEach>
+  </dgm:layoutNode>
+</dgm:layoutDef>
+</file>
+
+<file path=ppt/diagrams/layout11.xml><?xml version="1.0" encoding="utf-8"?>
+<dgm:layoutDef xmlns:dgm="http://schemas.openxmlformats.org/drawingml/2006/diagram" xmlns:a="http://schemas.openxmlformats.org/drawingml/2006/main" xmlns:r="http://schemas.openxmlformats.org/officeDocument/2006/relationships" uniqueId="test/curves">
+  <dgm:layoutNode name="diagram">
+    <dgm:alg type="lin"/>
+    <dgm:shape/>
+    <dgm:presOf/>
+    <dgm:constrLst>
+      <dgm:constr type="w" for="ch" ptType="node" refType="w"/>
+      <dgm:constr type="h" for="ch" ptType="node" op="equ"/>
+      <dgm:constr type="primFontSz" for="ch" ptType="node" op="equ" val="65"/>
+      <dgm:constr type="w" for="ch" ptType="sibTrans" refType="w" refFor="ch" refPtType="node" fact="0.4"/>
+    </dgm:constrLst>
+    <dgm:forEach name="nodes" axis="ch" ptType="node">
+      <dgm:layoutNode name="node">
+        <dgm:alg type="tx"/>
+        <dgm:shape type="roundRect">
+          <dgm:adjLst>
+            <dgm:adj idx="1" val="0.1"/>
+          </dgm:adjLst>
+        </dgm:shape>
+        <dgm:presOf axis="desOrSelf" ptType="node"/>
+        <dgm:constrLst>
+          <dgm:constr type="h" refType="w" fact="0.6"/>
+          <dgm:constr type="tMarg" refType="primFontSz" fact="0.3"/>
+          <dgm:constr type="bMarg" refType="primFontSz" fact="0.3"/>
+          <dgm:constr type="lMarg" refType="primFontSz" fact="0.3"/>
+          <dgm:constr type="rMarg" refType="primFontSz" fact="0.3"/>
+        </dgm:constrLst>
+        <dgm:ruleLst>
+          <dgm:rule type="primFontSz" val="5" fact="NaN" max="NaN"/>
+        </dgm:ruleLst>
+      </dgm:layoutNode>
+      <dgm:forEach name="arrows" axis="followSib" ptType="sibTrans" cnt="1">
+        <dgm:layoutNode name="arrow">
+          <dgm:alg type="conn">
+            <dgm:param type="connRout" val="curve"/>
+          </dgm:alg>
+          <dgm:shape type="conn"/>
+          <dgm:presOf axis="self"/>
+          <dgm:constrLst>
+            <dgm:constr type="h" refType="w" fact="0.62"/>
+            <dgm:constr type="connDist"/>
+            <dgm:constr type="begPad" refType="connDist" fact="0.25"/>
+            <dgm:constr type="endPad" refType="connDist" fact="0.22"/>
+          </dgm:constrLst>
+        </dgm:layoutNode>
+      </dgm:forEach>
+    </dgm:forEach>
+  </dgm:layoutNode>
+</dgm:layoutDef>
+</file>
+
+<file path=ppt/diagrams/layout12.xml><?xml version="1.0" encoding="utf-8"?>
+<dgm:layoutDef xmlns:dgm="http://schemas.openxmlformats.org/drawingml/2006/diagram" xmlns:a="http://schemas.openxmlformats.org/drawingml/2006/main" xmlns:r="http://schemas.openxmlformats.org/officeDocument/2006/relationships" uniqueId="test/turned">
+  <dgm:layoutNode name="diagram">
+    <dgm:alg type="lin"/>
+    <dgm:shape/>
+    <dgm:presOf/>
+    <dgm:constrLst>
+      <dgm:constr type="w" for="ch" forName="label" refType="h"/>
+      <dgm:constr type="h" for="ch" forName="label" refType="h" fact="0.25"/>
+      <dgm:constr type="w" for="ch" forName="gap" refType="h" refFor="ch" refForName="label" fact="2"/>
+      <dgm:constr type="primFontSz" for="ch" forName="label" op="equ" val="65"/>
+    </dgm:constrLst>
+    <dgm:forEach name="labels" axis="ch" ptType="node">
+      <dgm:layoutNode name="label">
+        <dgm:alg type="tx">
+          <dgm:param type="autoTxRot" val="grav"/>
+          <dgm:param type="txAnchorHorz" val="ctr"/>
+          <dgm:param type="parTxLTRAlign" val="l"/>
+        </dgm:alg>
+        <dgm:shape type="rect" rot="270"/>
+        <dgm:presOf axis="desOrSelf" ptType="node"/>
+        <dgm:constrLst>
+          <dgm:constr type="tMarg" refType="primFontSz" fact="0.3"/>
+          <dgm:constr type="bMarg" refType="primFontSz" fact="0.3"/>
+          <dgm:constr type="lMarg" refType="primFontSz" fact="0.3"/>
+          <dgm:constr type="rMarg" refType="primFontSz" fact="0.3"/>
+        </dgm:constrLst>
+        <dgm:ruleLst>
+          <dgm:rule type="primFontSz" val="5" fact="NaN" max="NaN"/>
+        </dgm:ruleLst>
+      </dgm:layoutNode>
+      <dgm:forEach name="gaps" axis="followSib" ptType="sibTrans" cnt="1">
+        <dgm:layoutNode name="gap">
+          <dgm:alg type="sp"/>
+          <dgm:shape/>
+          <dgm:presOf/>
+        </dgm:layoutNode>
+      </dgm:forEach>
+    </dgm:forEach>
+  </dgm:layoutNode>
+</dgm:layoutDef>
+</file>
+
+<file path=ppt/diagrams/layout13.xml><?xml version="1.0" encoding="utf-8"?>
+<dgm:layoutDef xmlns:dgm="http://schemas.openxmlformats.org/drawingml/2006/diagram" xmlns:a="http://schemas.openxmlformats.org/drawingml/2006/main" xmlns:r="http://schemas.openxmlformats.org/officeDocument/2006/relationships" uniqueId="test/process">
+  <dgm:layoutNode name="diagram">
+    <dgm:alg type="lin"/>
+    <dgm:shape/>
+    <dgm:presOf/>
+    <dgm:constrLst>
+      <dgm:constr type="w" for="ch" ptType="node" refType="w"/>
+      <dgm:constr type="h" for="ch" ptType="node" op="equ"/>
+      <dgm:constr type="primFontSz" for="ch" ptType="node" op="equ" val="65"/>
+      <dgm:constr type="w" for="ch" ptType="sibTrans" refType="w" refFor="ch" refPtType="node" fact="0.4"/>
+    </dgm:constrLst>
+    <dgm:forEach name="nodes" axis="ch" ptType="node">
+      <dgm:layoutNode name="node">
+        <dgm:alg type="tx"/>
+        <dgm:shape type="roundRect">
+          <dgm:adjLst>
+            <dgm:adj idx="1" val="0.1"/>
+          </dgm:adjLst>
+        </dgm:shape>
+        <dgm:presOf axis="desOrSelf" ptType="node"/>
+        <dgm:constrLst>
+          <dgm:constr type="h" refType="w" fact="0.6"/>
+          <dgm:constr type="tMarg" refType="primFontSz" fact="0.3"/>
+          <dgm:constr type="bMarg" refType="primFontSz" fact="0.3"/>
+          <dgm:constr type="lMarg" refType="primFontSz" fact="0.3"/>
+          <dgm:constr type="rMarg" refType="primFontSz" fact="0.3"/>
+        </dgm:constrLst>
+        <dgm:ruleLst>
+          <dgm:rule type="primFontSz" val="5" fact="NaN" max="NaN"/>
+        </dgm:ruleLst>
+      </dgm:layoutNode>
+      <dgm:forEach name="arrows" axis="followSib" ptType="sibTrans" cnt="1">
+        <dgm:layoutNode name="arrow">
+          <dgm:alg type="conn"/>
+          <dgm:shape type="conn"/>
+          <dgm:presOf axis="self"/>
+          <dgm:constrLst>
+            <dgm:constr type="h" refType="w" fact="0.62"/>
+            <dgm:constr type="connDist"/>
+            <dgm:constr type="begPad" refType="connDist" fact="0.25"/>
+            <dgm:constr type="endPad" refType="connDist" fact="0.22"/>
+          </dgm:constrLst>
+        </dgm:layoutNode>
+      </dgm:forEach>
     </dgm:forEach>
   </dgm:layoutNode>
 </dgm:layoutDef>
@@ -2024,6 +2420,160 @@
 </dgm:styleDef>
 </file>
 
+<file path=ppt/diagrams/quickStyle11.xml><?xml version="1.0" encoding="utf-8"?>
+<dgm:styleDef xmlns:dgm="http://schemas.openxmlformats.org/drawingml/2006/diagram" xmlns:a="http://schemas.openxmlformats.org/drawingml/2006/main" xmlns:r="http://schemas.openxmlformats.org/officeDocument/2006/relationships" uniqueId="test/style">
+  <dgm:styleLbl name="node1">
+    <dgm:style>
+      <a:lnRef idx="2">
+        <a:scrgbClr r="0" g="0" b="0"/>
+      </a:lnRef>
+      <a:fillRef idx="1">
+        <a:scrgbClr r="0" g="0" b="0"/>
+      </a:fillRef>
+      <a:effectRef idx="0">
+        <a:scrgbClr r="0" g="0" b="0"/>
+      </a:effectRef>
+      <a:fontRef idx="minor">
+        <a:schemeClr val="lt1"/>
+      </a:fontRef>
+    </dgm:style>
+  </dgm:styleLbl>
+  <dgm:styleLbl name="sibTrans2D1">
+    <dgm:style>
+      <a:lnRef idx="0">
+        <a:scrgbClr r="0" g="0" b="0"/>
+      </a:lnRef>
+      <a:fillRef idx="1">
+        <a:scrgbClr r="0" g="0" b="0"/>
+      </a:fillRef>
+      <a:effectRef idx="0">
+        <a:scrgbClr r="0" g="0" b="0"/>
+      </a:effectRef>
+      <a:fontRef idx="minor"/>
+    </dgm:style>
+  </dgm:styleLbl>
+  <dgm:styleLbl name="parChTrans1D1">
+    <dgm:style>
+      <a:lnRef idx="2">
+        <a:scrgbClr r="0" g="0" b="0"/>
+      </a:lnRef>
+      <a:fillRef idx="0">
+        <a:scrgbClr r="0" g="0" b="0"/>
+      </a:fillRef>
+      <a:effectRef idx="0">
+        <a:scrgbClr r="0" g="0" b="0"/>
+      </a:effectRef>
+      <a:fontRef idx="minor"/>
+    </dgm:style>
+  </dgm:styleLbl>
+</dgm:styleDef>
+</file>
+
+<file path=ppt/diagrams/quickStyle12.xml><?xml version="1.0" encoding="utf-8"?>
+<dgm:styleDef xmlns:dgm="http://schemas.openxmlformats.org/drawingml/2006/diagram" xmlns:a="http://schemas.openxmlformats.org/drawingml/2006/main" xmlns:r="http://schemas.openxmlformats.org/officeDocument/2006/relationships" uniqueId="test/style">
+  <dgm:styleLbl name="node1">
+    <dgm:style>
+      <a:lnRef idx="2">
+        <a:scrgbClr r="0" g="0" b="0"/>
+      </a:lnRef>
+      <a:fillRef idx="1">
+        <a:scrgbClr r="0" g="0" b="0"/>
+      </a:fillRef>
+      <a:effectRef idx="0">
+        <a:scrgbClr r="0" g="0" b="0"/>
+      </a:effectRef>
+      <a:fontRef idx="minor">
+        <a:schemeClr val="lt1"/>
+      </a:fontRef>
+    </dgm:style>
+  </dgm:styleLbl>
+  <dgm:styleLbl name="sibTrans2D1">
+    <dgm:style>
+      <a:lnRef idx="0">
+        <a:scrgbClr r="0" g="0" b="0"/>
+      </a:lnRef>
+      <a:fillRef idx="1">
+        <a:scrgbClr r="0" g="0" b="0"/>
+      </a:fillRef>
+      <a:effectRef idx="0">
+        <a:scrgbClr r="0" g="0" b="0"/>
+      </a:effectRef>
+      <a:fontRef idx="minor"/>
+    </dgm:style>
+  </dgm:styleLbl>
+  <dgm:styleLbl name="parChTrans1D1">
+    <dgm:style>
+      <a:lnRef idx="2">
+        <a:scrgbClr r="0" g="0" b="0"/>
+      </a:lnRef>
+      <a:fillRef idx="0">
+        <a:scrgbClr r="0" g="0" b="0"/>
+      </a:fillRef>
+      <a:effectRef idx="0">
+        <a:scrgbClr r="0" g="0" b="0"/>
+      </a:effectRef>
+      <a:fontRef idx="minor"/>
+    </dgm:style>
+  </dgm:styleLbl>
+</dgm:styleDef>
+</file>
+
+<file path=ppt/diagrams/quickStyle13.xml><?xml version="1.0" encoding="utf-8"?>
+<dgm:styleDef xmlns:dgm="http://schemas.openxmlformats.org/drawingml/2006/diagram" xmlns:a="http://schemas.openxmlformats.org/drawingml/2006/main" xmlns:r="http://schemas.openxmlformats.org/officeDocument/2006/relationships" uniqueId="test/style3d">
+  <dgm:styleLbl name="node1">
+    <dgm:scene3d>
+      <a:camera prst="orthographicFront"/>
+      <a:lightRig rig="threePt" dir="t"/>
+    </dgm:scene3d>
+    <dgm:sp3d>
+      <a:bevelT w="63500" h="25400"/>
+    </dgm:sp3d>
+    <dgm:style>
+      <a:lnRef idx="0">
+        <a:scrgbClr r="0" g="0" b="0"/>
+      </a:lnRef>
+      <a:fillRef idx="2">
+        <a:scrgbClr r="0" g="0" b="0"/>
+      </a:fillRef>
+      <a:effectRef idx="2">
+        <a:scrgbClr r="0" g="0" b="0"/>
+      </a:effectRef>
+      <a:fontRef idx="minor">
+        <a:schemeClr val="lt1"/>
+      </a:fontRef>
+    </dgm:style>
+  </dgm:styleLbl>
+  <dgm:styleLbl name="sibTrans2D1">
+    <dgm:style>
+      <a:lnRef idx="0">
+        <a:scrgbClr r="0" g="0" b="0"/>
+      </a:lnRef>
+      <a:fillRef idx="1">
+        <a:scrgbClr r="0" g="0" b="0"/>
+      </a:fillRef>
+      <a:effectRef idx="0">
+        <a:scrgbClr r="0" g="0" b="0"/>
+      </a:effectRef>
+      <a:fontRef idx="minor"/>
+    </dgm:style>
+  </dgm:styleLbl>
+  <dgm:styleLbl name="parChTrans1D1">
+    <dgm:style>
+      <a:lnRef idx="2">
+        <a:scrgbClr r="0" g="0" b="0"/>
+      </a:lnRef>
+      <a:fillRef idx="0">
+        <a:scrgbClr r="0" g="0" b="0"/>
+      </a:fillRef>
+      <a:effectRef idx="0">
+        <a:scrgbClr r="0" g="0" b="0"/>
+      </a:effectRef>
+      <a:fontRef idx="minor"/>
+    </dgm:style>
+  </dgm:styleLbl>
+</dgm:styleDef>
+</file>
+
 <file path=ppt/diagrams/quickStyle2.xml><?xml version="1.0" encoding="utf-8"?>
 <dgm:styleDef xmlns:dgm="http://schemas.openxmlformats.org/drawingml/2006/diagram" xmlns:a="http://schemas.openxmlformats.org/drawingml/2006/main" xmlns:r="http://schemas.openxmlformats.org/officeDocument/2006/relationships" uniqueId="test/style">
   <dgm:styleLbl name="node1">
@@ -2491,6 +3041,99 @@
       <p:graphicFrame>
         <p:nvGraphicFramePr>
           <p:cNvPr id="2" name="Diagram 10"/>
+          <p:cNvGraphicFramePr/>
+          <p:nvPr/>
+        </p:nvGraphicFramePr>
+        <p:xfrm>
+          <a:off x="1524000" y="571500"/>
+          <a:ext cx="6096000" cy="4000500"/>
+        </p:xfrm>
+        <a:graphic>
+          <a:graphicData uri="http://schemas.openxmlformats.org/drawingml/2006/diagram">
+            <dgm:relIds xmlns:dgm="http://schemas.openxmlformats.org/drawingml/2006/diagram" r:dm="rId2" r:lo="rId3" r:qs="rId4" r:cs="rId5"/>
+          </a:graphicData>
+        </a:graphic>
+      </p:graphicFrame>
+    </p:spTree>
+  </p:cSld>
+</p:sld>
+</file>
+
+<file path=ppt/slides/slide11.xml><?xml version="1.0" encoding="utf-8"?>
+<p:sld xmlns:a="http://schemas.openxmlformats.org/drawingml/2006/main" xmlns:r="http://schemas.openxmlformats.org/officeDocument/2006/relationships" xmlns:p="http://schemas.openxmlformats.org/presentationml/2006/main">
+  <p:cSld>
+    <p:spTree>
+      <p:nvGrpSpPr>
+        <p:cNvPr id="1" name=""/>
+        <p:cNvGrpSpPr/>
+        <p:nvPr/>
+      </p:nvGrpSpPr>
+      <p:grpSpPr/>
+      <p:graphicFrame>
+        <p:nvGraphicFramePr>
+          <p:cNvPr id="2" name="Diagram 11"/>
+          <p:cNvGraphicFramePr/>
+          <p:nvPr/>
+        </p:nvGraphicFramePr>
+        <p:xfrm>
+          <a:off x="1524000" y="571500"/>
+          <a:ext cx="6096000" cy="4000500"/>
+        </p:xfrm>
+        <a:graphic>
+          <a:graphicData uri="http://schemas.openxmlformats.org/drawingml/2006/diagram">
+            <dgm:relIds xmlns:dgm="http://schemas.openxmlformats.org/drawingml/2006/diagram" r:dm="rId2" r:lo="rId3" r:qs="rId4" r:cs="rId5"/>
+          </a:graphicData>
+        </a:graphic>
+      </p:graphicFrame>
+    </p:spTree>
+  </p:cSld>
+</p:sld>
+</file>
+
+<file path=ppt/slides/slide12.xml><?xml version="1.0" encoding="utf-8"?>
+<p:sld xmlns:a="http://schemas.openxmlformats.org/drawingml/2006/main" xmlns:r="http://schemas.openxmlformats.org/officeDocument/2006/relationships" xmlns:p="http://schemas.openxmlformats.org/presentationml/2006/main">
+  <p:cSld>
+    <p:spTree>
+      <p:nvGrpSpPr>
+        <p:cNvPr id="1" name=""/>
+        <p:cNvGrpSpPr/>
+        <p:nvPr/>
+      </p:nvGrpSpPr>
+      <p:grpSpPr/>
+      <p:graphicFrame>
+        <p:nvGraphicFramePr>
+          <p:cNvPr id="2" name="Diagram 12"/>
+          <p:cNvGraphicFramePr/>
+          <p:nvPr/>
+        </p:nvGraphicFramePr>
+        <p:xfrm>
+          <a:off x="1524000" y="571500"/>
+          <a:ext cx="6096000" cy="4000500"/>
+        </p:xfrm>
+        <a:graphic>
+          <a:graphicData uri="http://schemas.openxmlformats.org/drawingml/2006/diagram">
+            <dgm:relIds xmlns:dgm="http://schemas.openxmlformats.org/drawingml/2006/diagram" r:dm="rId2" r:lo="rId3" r:qs="rId4" r:cs="rId5"/>
+          </a:graphicData>
+        </a:graphic>
+      </p:graphicFrame>
+    </p:spTree>
+  </p:cSld>
+</p:sld>
+</file>
+
+<file path=ppt/slides/slide13.xml><?xml version="1.0" encoding="utf-8"?>
+<p:sld xmlns:a="http://schemas.openxmlformats.org/drawingml/2006/main" xmlns:r="http://schemas.openxmlformats.org/officeDocument/2006/relationships" xmlns:p="http://schemas.openxmlformats.org/presentationml/2006/main">
+  <p:cSld>
+    <p:spTree>
+      <p:nvGrpSpPr>
+        <p:cNvPr id="1" name=""/>
+        <p:cNvGrpSpPr/>
+        <p:nvPr/>
+      </p:nvGrpSpPr>
+      <p:grpSpPr/>
+      <p:graphicFrame>
+        <p:nvGraphicFramePr>
+          <p:cNvPr id="2" name="Diagram 13"/>
           <p:cNvGraphicFramePr/>
           <p:nvPr/>
         </p:nvGraphicFramePr>
@@ -2807,12 +3450,51 @@
       </a:minorFont>
     </a:fontScheme>
     <a:fmtScheme name="T">
-      <a:fillStyleLst/>
+      <a:fillStyleLst>
+        <a:solidFill>
+          <a:schemeClr val="phClr"/>
+        </a:solidFill>
+        <a:gradFill rotWithShape="1">
+          <a:gsLst>
+            <a:gs pos="0">
+              <a:schemeClr val="phClr">
+                <a:tint val="50000"/>
+              </a:schemeClr>
+            </a:gs>
+            <a:gs pos="100000">
+              <a:schemeClr val="phClr">
+                <a:shade val="80000"/>
+              </a:schemeClr>
+            </a:gs>
+          </a:gsLst>
+          <a:lin ang="5400000" scaled="0"/>
+        </a:gradFill>
+        <a:solidFill>
+          <a:schemeClr val="phClr"/>
+        </a:solidFill>
+      </a:fillStyleLst>
       <a:lnStyleLst>
         <a:ln w="9525"/>
         <a:ln w="25400"/>
         <a:ln w="38100"/>
       </a:lnStyleLst>
+      <a:effectStyleLst>
+        <a:effectStyle>
+          <a:effectLst/>
+        </a:effectStyle>
+        <a:effectStyle>
+          <a:effectLst>
+            <a:outerShdw blurRad="40000" dist="38100" dir="5400000" rotWithShape="0">
+              <a:srgbClr val="000000">
+                <a:alpha val="40000"/>
+              </a:srgbClr>
+            </a:outerShdw>
+          </a:effectLst>
+        </a:effectStyle>
+        <a:effectStyle>
+          <a:effectLst/>
+        </a:effectStyle>
+      </a:effectStyleLst>
     </a:fmtScheme>
   </a:themeElements>
 </a:theme>
